--- a/Office-Presentation-English.pptx
+++ b/Office-Presentation-English.pptx
@@ -10,9 +10,12 @@
     <p:sldId id="258" r:id="rId4"/>
     <p:sldId id="259" r:id="rId5"/>
     <p:sldId id="260" r:id="rId6"/>
+    <p:sldId id="261" r:id="rId7"/>
+    <p:sldId id="262" r:id="rId8"/>
+    <p:sldId id="263" r:id="rId9"/>
   </p:sldIdLst>
   <p:notesMasterIdLst>
-    <p:notesMasterId r:id="rId7"/>
+    <p:notesMasterId r:id="rId10"/>
   </p:notesMasterIdLst>
   <p:sldSz cx="12192000" cy="6858000"/>
   <p:notesSz cx="6858000" cy="12192000"/>
@@ -882,6 +885,270 @@
             <a:fld id="{F7021451-1387-4CA6-816F-3879F97B5CBC}" type="slidenum">
               <a:rPr lang="en-US"/>
               <a:t>5</a:t>
+            </a:fld>
+            <a:endParaRPr lang="en-US"/>
+          </a:p>
+        </p:txBody>
+      </p:sp>
+    </p:spTree>
+    <p:extLst>
+      <p:ext uri="{BB962C8B-B14F-4D97-AF65-F5344CB8AC3E}">
+        <p14:creationId xmlns:p14="http://schemas.microsoft.com/office/powerpoint/2010/main" val="1024086991"/>
+      </p:ext>
+    </p:extLst>
+  </p:cSld>
+  <p:clrMapOvr>
+    <a:masterClrMapping/>
+  </p:clrMapOvr>
+</p:notes>
+</file>
+
+<file path=ppt/notesSlides/notesSlide6.xml><?xml version="1.0" encoding="utf-8"?>
+<p:notes xmlns:a="http://schemas.openxmlformats.org/drawingml/2006/main" xmlns:r="http://schemas.openxmlformats.org/officeDocument/2006/relationships" xmlns:p="http://schemas.openxmlformats.org/presentationml/2006/main">
+  <p:cSld>
+    <p:spTree>
+      <p:nvGrpSpPr>
+        <p:cNvPr id="1" name=""/>
+        <p:cNvGrpSpPr/>
+        <p:nvPr/>
+      </p:nvGrpSpPr>
+      <p:grpSpPr>
+        <a:xfrm>
+          <a:off x="0" y="0"/>
+          <a:ext cx="0" cy="0"/>
+          <a:chOff x="0" y="0"/>
+          <a:chExt cx="0" cy="0"/>
+        </a:xfrm>
+      </p:grpSpPr>
+      <p:sp>
+        <p:nvSpPr>
+          <p:cNvPr id="2" name="Slide Image Placeholder 1"/>
+          <p:cNvSpPr>
+            <a:spLocks noGrp="1" noRot="1" noChangeAspect="1"/>
+          </p:cNvSpPr>
+          <p:nvPr>
+            <p:ph type="sldImg"/>
+          </p:nvPr>
+        </p:nvSpPr>
+        <p:spPr/>
+      </p:sp>
+      <p:sp>
+        <p:nvSpPr>
+          <p:cNvPr id="3" name="Notes Placeholder 2"/>
+          <p:cNvSpPr>
+            <a:spLocks noGrp="1"/>
+          </p:cNvSpPr>
+          <p:nvPr>
+            <p:ph type="body" idx="1"/>
+          </p:nvPr>
+        </p:nvSpPr>
+        <p:spPr/>
+        <p:txBody>
+          <a:bodyPr/>
+          <a:lstStyle/>
+          <a:p>
+            <a:r>
+              <a:rPr lang="en-US" dirty="0"/>
+              <a:t/>
+            </a:r>
+            <a:endParaRPr lang="en-US" dirty="0"/>
+          </a:p>
+        </p:txBody>
+      </p:sp>
+      <p:sp>
+        <p:nvSpPr>
+          <p:cNvPr id="4" name="Slide Number Placeholder 3"/>
+          <p:cNvSpPr>
+            <a:spLocks noGrp="1"/>
+          </p:cNvSpPr>
+          <p:nvPr>
+            <p:ph type="sldNum" sz="quarter" idx="10"/>
+          </p:nvPr>
+        </p:nvSpPr>
+        <p:spPr/>
+        <p:txBody>
+          <a:bodyPr/>
+          <a:lstStyle/>
+          <a:p>
+            <a:fld id="{F7021451-1387-4CA6-816F-3879F97B5CBC}" type="slidenum">
+              <a:rPr lang="en-US"/>
+              <a:t>6</a:t>
+            </a:fld>
+            <a:endParaRPr lang="en-US"/>
+          </a:p>
+        </p:txBody>
+      </p:sp>
+    </p:spTree>
+    <p:extLst>
+      <p:ext uri="{BB962C8B-B14F-4D97-AF65-F5344CB8AC3E}">
+        <p14:creationId xmlns:p14="http://schemas.microsoft.com/office/powerpoint/2010/main" val="1024086991"/>
+      </p:ext>
+    </p:extLst>
+  </p:cSld>
+  <p:clrMapOvr>
+    <a:masterClrMapping/>
+  </p:clrMapOvr>
+</p:notes>
+</file>
+
+<file path=ppt/notesSlides/notesSlide7.xml><?xml version="1.0" encoding="utf-8"?>
+<p:notes xmlns:a="http://schemas.openxmlformats.org/drawingml/2006/main" xmlns:r="http://schemas.openxmlformats.org/officeDocument/2006/relationships" xmlns:p="http://schemas.openxmlformats.org/presentationml/2006/main">
+  <p:cSld>
+    <p:spTree>
+      <p:nvGrpSpPr>
+        <p:cNvPr id="1" name=""/>
+        <p:cNvGrpSpPr/>
+        <p:nvPr/>
+      </p:nvGrpSpPr>
+      <p:grpSpPr>
+        <a:xfrm>
+          <a:off x="0" y="0"/>
+          <a:ext cx="0" cy="0"/>
+          <a:chOff x="0" y="0"/>
+          <a:chExt cx="0" cy="0"/>
+        </a:xfrm>
+      </p:grpSpPr>
+      <p:sp>
+        <p:nvSpPr>
+          <p:cNvPr id="2" name="Slide Image Placeholder 1"/>
+          <p:cNvSpPr>
+            <a:spLocks noGrp="1" noRot="1" noChangeAspect="1"/>
+          </p:cNvSpPr>
+          <p:nvPr>
+            <p:ph type="sldImg"/>
+          </p:nvPr>
+        </p:nvSpPr>
+        <p:spPr/>
+      </p:sp>
+      <p:sp>
+        <p:nvSpPr>
+          <p:cNvPr id="3" name="Notes Placeholder 2"/>
+          <p:cNvSpPr>
+            <a:spLocks noGrp="1"/>
+          </p:cNvSpPr>
+          <p:nvPr>
+            <p:ph type="body" idx="1"/>
+          </p:nvPr>
+        </p:nvSpPr>
+        <p:spPr/>
+        <p:txBody>
+          <a:bodyPr/>
+          <a:lstStyle/>
+          <a:p>
+            <a:r>
+              <a:rPr lang="en-US" dirty="0"/>
+              <a:t/>
+            </a:r>
+            <a:endParaRPr lang="en-US" dirty="0"/>
+          </a:p>
+        </p:txBody>
+      </p:sp>
+      <p:sp>
+        <p:nvSpPr>
+          <p:cNvPr id="4" name="Slide Number Placeholder 3"/>
+          <p:cNvSpPr>
+            <a:spLocks noGrp="1"/>
+          </p:cNvSpPr>
+          <p:nvPr>
+            <p:ph type="sldNum" sz="quarter" idx="10"/>
+          </p:nvPr>
+        </p:nvSpPr>
+        <p:spPr/>
+        <p:txBody>
+          <a:bodyPr/>
+          <a:lstStyle/>
+          <a:p>
+            <a:fld id="{F7021451-1387-4CA6-816F-3879F97B5CBC}" type="slidenum">
+              <a:rPr lang="en-US"/>
+              <a:t>7</a:t>
+            </a:fld>
+            <a:endParaRPr lang="en-US"/>
+          </a:p>
+        </p:txBody>
+      </p:sp>
+    </p:spTree>
+    <p:extLst>
+      <p:ext uri="{BB962C8B-B14F-4D97-AF65-F5344CB8AC3E}">
+        <p14:creationId xmlns:p14="http://schemas.microsoft.com/office/powerpoint/2010/main" val="1024086991"/>
+      </p:ext>
+    </p:extLst>
+  </p:cSld>
+  <p:clrMapOvr>
+    <a:masterClrMapping/>
+  </p:clrMapOvr>
+</p:notes>
+</file>
+
+<file path=ppt/notesSlides/notesSlide8.xml><?xml version="1.0" encoding="utf-8"?>
+<p:notes xmlns:a="http://schemas.openxmlformats.org/drawingml/2006/main" xmlns:r="http://schemas.openxmlformats.org/officeDocument/2006/relationships" xmlns:p="http://schemas.openxmlformats.org/presentationml/2006/main">
+  <p:cSld>
+    <p:spTree>
+      <p:nvGrpSpPr>
+        <p:cNvPr id="1" name=""/>
+        <p:cNvGrpSpPr/>
+        <p:nvPr/>
+      </p:nvGrpSpPr>
+      <p:grpSpPr>
+        <a:xfrm>
+          <a:off x="0" y="0"/>
+          <a:ext cx="0" cy="0"/>
+          <a:chOff x="0" y="0"/>
+          <a:chExt cx="0" cy="0"/>
+        </a:xfrm>
+      </p:grpSpPr>
+      <p:sp>
+        <p:nvSpPr>
+          <p:cNvPr id="2" name="Slide Image Placeholder 1"/>
+          <p:cNvSpPr>
+            <a:spLocks noGrp="1" noRot="1" noChangeAspect="1"/>
+          </p:cNvSpPr>
+          <p:nvPr>
+            <p:ph type="sldImg"/>
+          </p:nvPr>
+        </p:nvSpPr>
+        <p:spPr/>
+      </p:sp>
+      <p:sp>
+        <p:nvSpPr>
+          <p:cNvPr id="3" name="Notes Placeholder 2"/>
+          <p:cNvSpPr>
+            <a:spLocks noGrp="1"/>
+          </p:cNvSpPr>
+          <p:nvPr>
+            <p:ph type="body" idx="1"/>
+          </p:nvPr>
+        </p:nvSpPr>
+        <p:spPr/>
+        <p:txBody>
+          <a:bodyPr/>
+          <a:lstStyle/>
+          <a:p>
+            <a:r>
+              <a:rPr lang="en-US" dirty="0"/>
+              <a:t/>
+            </a:r>
+            <a:endParaRPr lang="en-US" dirty="0"/>
+          </a:p>
+        </p:txBody>
+      </p:sp>
+      <p:sp>
+        <p:nvSpPr>
+          <p:cNvPr id="4" name="Slide Number Placeholder 3"/>
+          <p:cNvSpPr>
+            <a:spLocks noGrp="1"/>
+          </p:cNvSpPr>
+          <p:nvPr>
+            <p:ph type="sldNum" sz="quarter" idx="10"/>
+          </p:nvPr>
+        </p:nvSpPr>
+        <p:spPr/>
+        <p:txBody>
+          <a:bodyPr/>
+          <a:lstStyle/>
+          <a:p>
+            <a:fld id="{F7021451-1387-4CA6-816F-3879F97B5CBC}" type="slidenum">
+              <a:rPr lang="en-US"/>
+              <a:t>8</a:t>
             </a:fld>
             <a:endParaRPr lang="en-US"/>
           </a:p>
@@ -1239,7 +1506,7 @@
         </p:nvSpPr>
         <p:spPr>
           <a:xfrm>
-            <a:off x="731520" y="1920240"/>
+            <a:off x="731520" y="1828800"/>
             <a:ext cx="10789920" cy="731520"/>
           </a:xfrm>
           <a:prstGeom prst="rect">
@@ -1256,14 +1523,14 @@
               <a:buNone/>
             </a:pPr>
             <a:r>
-              <a:rPr lang="en-US" sz="4200" b="1" dirty="0">
+              <a:rPr lang="en-US" sz="4000" b="1" dirty="0">
                 <a:solidFill>
                   <a:srgbClr val="FFFFFF"/>
                 </a:solidFill>
               </a:rPr>
-              <a:t>Welcome to Our Office</a:t>
-            </a:r>
-            <a:endParaRPr lang="en-US" sz="4200" dirty="0"/>
+              <a:t>Day 1: Introduction to NLP</a:t>
+            </a:r>
+            <a:endParaRPr lang="en-US" sz="4000" dirty="0"/>
           </a:p>
         </p:txBody>
       </p:sp>
@@ -1275,8 +1542,8 @@
         </p:nvSpPr>
         <p:spPr>
           <a:xfrm>
-            <a:off x="1005840" y="2926080"/>
-            <a:ext cx="10241280" cy="457200"/>
+            <a:off x="1188720" y="2834640"/>
+            <a:ext cx="9875520" cy="457200"/>
           </a:xfrm>
           <a:prstGeom prst="rect">
             <a:avLst/>
@@ -1297,7 +1564,7 @@
                   <a:srgbClr val="DBEAFE"/>
                 </a:solidFill>
               </a:rPr>
-              <a:t>A quick overview of our workplace, culture, and operations</a:t>
+              <a:t>Theory and practical examples (no coding)</a:t>
             </a:r>
             <a:endParaRPr lang="en-US" sz="1800" dirty="0"/>
           </a:p>
@@ -1311,8 +1578,8 @@
         </p:nvSpPr>
         <p:spPr>
           <a:xfrm>
-            <a:off x="5029200" y="3931920"/>
-            <a:ext cx="2194560" cy="640080"/>
+            <a:off x="4480560" y="3840480"/>
+            <a:ext cx="3200400" cy="640080"/>
           </a:xfrm>
           <a:prstGeom prst="roundRect">
             <a:avLst/>
@@ -1336,8 +1603,8 @@
         </p:nvSpPr>
         <p:spPr>
           <a:xfrm>
-            <a:off x="5029200" y="4096512"/>
-            <a:ext cx="2194560" cy="274320"/>
+            <a:off x="4480560" y="4041648"/>
+            <a:ext cx="3200400" cy="237744"/>
           </a:xfrm>
           <a:prstGeom prst="rect">
             <a:avLst/>
@@ -1353,14 +1620,14 @@
               <a:buNone/>
             </a:pPr>
             <a:r>
-              <a:rPr lang="en-US" sz="1600" b="1" dirty="0">
+              <a:rPr lang="en-US" sz="1400" b="1" dirty="0">
                 <a:solidFill>
                   <a:srgbClr val="FFFFFF"/>
                 </a:solidFill>
               </a:rPr>
-              <a:t>2026</a:t>
-            </a:r>
-            <a:endParaRPr lang="en-US" sz="1600" dirty="0"/>
+              <a:t>Beginner -&gt; Intermediate</a:t>
+            </a:r>
+            <a:endParaRPr lang="en-US" sz="1400" dirty="0"/>
           </a:p>
         </p:txBody>
       </p:sp>
@@ -1430,7 +1697,7 @@
         <p:spPr>
           <a:xfrm>
             <a:off x="548640" y="201168"/>
-            <a:ext cx="7772400" cy="365760"/>
+            <a:ext cx="9601200" cy="365760"/>
           </a:xfrm>
           <a:prstGeom prst="rect">
             <a:avLst/>
@@ -1451,7 +1718,7 @@
                   <a:srgbClr val="FFFFFF"/>
                 </a:solidFill>
               </a:rPr>
-              <a:t>Who We Are</a:t>
+              <a:t>What Is NLP and Why Is It Hard?</a:t>
             </a:r>
             <a:endParaRPr lang="en-US" sz="2000" dirty="0"/>
           </a:p>
@@ -1466,7 +1733,7 @@
         <p:spPr>
           <a:xfrm>
             <a:off x="548640" y="914400"/>
-            <a:ext cx="11155680" cy="365760"/>
+            <a:ext cx="10972800" cy="365760"/>
           </a:xfrm>
           <a:prstGeom prst="rect">
             <a:avLst/>
@@ -1487,7 +1754,7 @@
                   <a:srgbClr val="7F8C8D"/>
                 </a:solidFill>
               </a:rPr>
-              <a:t>Our mission and core values</a:t>
+              <a:t>Core concepts and challenges</a:t>
             </a:r>
             <a:endParaRPr lang="en-US" sz="1300" dirty="0"/>
           </a:p>
@@ -1501,96 +1768,136 @@
         </p:nvSpPr>
         <p:spPr>
           <a:xfrm>
-            <a:off x="731520" y="1645920"/>
-            <a:ext cx="10972800" cy="1463040"/>
-          </a:xfrm>
-          <a:prstGeom prst="rect">
-            <a:avLst/>
-          </a:prstGeom>
-          <a:noFill/>
-          <a:ln/>
-        </p:spPr>
-        <p:txBody>
-          <a:bodyPr wrap="square" rtlCol="0" anchor="t"/>
+            <a:off x="731520" y="1463040"/>
+            <a:ext cx="10972800" cy="640080"/>
+          </a:xfrm>
+          <a:prstGeom prst="rect">
+            <a:avLst/>
+          </a:prstGeom>
+          <a:noFill/>
+          <a:ln/>
+        </p:spPr>
+        <p:txBody>
+          <a:bodyPr wrap="square" rtlCol="0" anchor="ctr"/>
           <a:lstStyle/>
           <a:p>
             <a:pPr indent="0" marL="0">
               <a:buNone/>
             </a:pPr>
             <a:r>
-              <a:rPr lang="en-US" sz="1800" b="1" dirty="0">
+              <a:rPr lang="en-US" sz="1600" dirty="0">
                 <a:solidFill>
                   <a:srgbClr val="1C2833"/>
                 </a:solidFill>
               </a:rPr>
-              <a:t>Mission: </a:t>
-            </a:r>
-            <a:pPr indent="0" marL="0">
-              <a:buNone/>
-            </a:pPr>
-            <a:r>
-              <a:rPr lang="en-US" sz="1800" dirty="0">
-                <a:solidFill>
-                  <a:srgbClr val="334155"/>
-                </a:solidFill>
-              </a:rPr>
-              <a:t>Deliver excellent services with efficiency and integrity.</a:t>
-            </a:r>
-            <a:pPr indent="0" marL="0">
-              <a:buNone/>
-            </a:pPr>
-            <a:endParaRPr lang="en-US" sz="1800" dirty="0"/>
-          </a:p>
-          <a:p>
-            <a:pPr indent="0" marL="0">
-              <a:buNone/>
-            </a:pPr>
-            <a:r>
-              <a:rPr lang="en-US" sz="1800" b="1" dirty="0">
+              <a:t>Natural Language Processing enables computers to understand and generate human language.</a:t>
+            </a:r>
+            <a:endParaRPr lang="en-US" sz="1600" dirty="0"/>
+          </a:p>
+        </p:txBody>
+      </p:sp>
+      <p:sp>
+        <p:nvSpPr>
+          <p:cNvPr id="6" name="Text 4"/>
+          <p:cNvSpPr/>
+          <p:nvPr/>
+        </p:nvSpPr>
+        <p:spPr>
+          <a:xfrm>
+            <a:off x="914400" y="2194560"/>
+            <a:ext cx="10424160" cy="2377440"/>
+          </a:xfrm>
+          <a:prstGeom prst="rect">
+            <a:avLst/>
+          </a:prstGeom>
+          <a:noFill/>
+          <a:ln/>
+        </p:spPr>
+        <p:txBody>
+          <a:bodyPr wrap="square" rtlCol="0" anchor="ctr"/>
+          <a:lstStyle/>
+          <a:p>
+            <a:pPr marL="177800" indent="-177800">
+              <a:buSzPct val="100000"/>
+              <a:buChar char="•"/>
+            </a:pPr>
+            <a:r>
+              <a:rPr lang="en-US" sz="1500" dirty="0">
                 <a:solidFill>
                   <a:srgbClr val="1C2833"/>
                 </a:solidFill>
               </a:rPr>
-              <a:t>Vision: </a:t>
-            </a:r>
-            <a:endParaRPr lang="en-US" sz="1800" dirty="0"/>
-          </a:p>
-          <a:p>
-            <a:pPr indent="0" marL="0">
-              <a:buNone/>
-            </a:pPr>
-            <a:r>
-              <a:rPr lang="en-US" sz="1800" dirty="0">
-                <a:solidFill>
-                  <a:srgbClr val="334155"/>
-                </a:solidFill>
-              </a:rPr>
-              <a:t>Build a smart, collaborative, and future-ready workplace.</a:t>
-            </a:r>
-            <a:endParaRPr lang="en-US" sz="1800" dirty="0"/>
-          </a:p>
-        </p:txBody>
-      </p:sp>
-      <p:sp>
-        <p:nvSpPr>
-          <p:cNvPr id="6" name="Shape 4"/>
-          <p:cNvSpPr/>
-          <p:nvPr/>
-        </p:nvSpPr>
-        <p:spPr>
-          <a:xfrm>
-            <a:off x="822960" y="3474720"/>
-            <a:ext cx="5029200" cy="868680"/>
+              <a:t>Language includes meaning, context, intent, and emotion.</a:t>
+            </a:r>
+            <a:endParaRPr lang="en-US" sz="1500" dirty="0"/>
+          </a:p>
+          <a:p>
+            <a:pPr marL="177800" indent="-177800">
+              <a:buSzPct val="100000"/>
+              <a:buChar char="•"/>
+            </a:pPr>
+            <a:r>
+              <a:rPr lang="en-US" sz="1500" dirty="0">
+                <a:solidFill>
+                  <a:srgbClr val="1C2833"/>
+                </a:solidFill>
+              </a:rPr>
+              <a:t>Ambiguity is the biggest challenge.</a:t>
+            </a:r>
+            <a:endParaRPr lang="en-US" sz="1500" dirty="0"/>
+          </a:p>
+          <a:p>
+            <a:pPr marL="177800" indent="-177800">
+              <a:buSzPct val="100000"/>
+              <a:buChar char="•"/>
+            </a:pPr>
+            <a:r>
+              <a:rPr lang="en-US" sz="1500" dirty="0">
+                <a:solidFill>
+                  <a:srgbClr val="1C2833"/>
+                </a:solidFill>
+              </a:rPr>
+              <a:t>Humans resolve ambiguity quickly using context; machines need explicit modeling.</a:t>
+            </a:r>
+            <a:endParaRPr lang="en-US" sz="1500" dirty="0"/>
+          </a:p>
+          <a:p>
+            <a:pPr marL="177800" indent="-177800">
+              <a:buSzPct val="100000"/>
+              <a:buChar char="•"/>
+            </a:pPr>
+            <a:r>
+              <a:rPr lang="en-US" sz="1500" dirty="0">
+                <a:solidFill>
+                  <a:srgbClr val="1C2833"/>
+                </a:solidFill>
+              </a:rPr>
+              <a:t>Common issues: sarcasm, idioms, misspellings, slang, negation, and coreference.</a:t>
+            </a:r>
+            <a:endParaRPr lang="en-US" sz="1500" dirty="0"/>
+          </a:p>
+        </p:txBody>
+      </p:sp>
+      <p:sp>
+        <p:nvSpPr>
+          <p:cNvPr id="7" name="Shape 5"/>
+          <p:cNvSpPr/>
+          <p:nvPr/>
+        </p:nvSpPr>
+        <p:spPr>
+          <a:xfrm>
+            <a:off x="822960" y="4937760"/>
+            <a:ext cx="10789920" cy="1188720"/>
           </a:xfrm>
           <a:prstGeom prst="roundRect">
             <a:avLst/>
           </a:prstGeom>
           <a:solidFill>
-            <a:srgbClr val="F3EEFF"/>
+            <a:srgbClr val="FFFFFF"/>
           </a:solidFill>
           <a:ln w="12700">
             <a:solidFill>
-              <a:srgbClr val="D8CCF4"/>
+              <a:srgbClr val="BDC3C7"/>
             </a:solidFill>
             <a:prstDash val="solid"/>
           </a:ln>
@@ -1598,64 +1905,39 @@
       </p:sp>
       <p:sp>
         <p:nvSpPr>
-          <p:cNvPr id="7" name="Text 5"/>
-          <p:cNvSpPr/>
-          <p:nvPr/>
-        </p:nvSpPr>
-        <p:spPr>
-          <a:xfrm>
-            <a:off x="1143000" y="3730752"/>
-            <a:ext cx="4389120" cy="365760"/>
-          </a:xfrm>
-          <a:prstGeom prst="rect">
-            <a:avLst/>
-          </a:prstGeom>
-          <a:noFill/>
-          <a:ln/>
-        </p:spPr>
-        <p:txBody>
-          <a:bodyPr wrap="square" rtlCol="0" anchor="ctr"/>
-          <a:lstStyle/>
-          <a:p>
-            <a:pPr algn="l" indent="0" marL="0">
-              <a:buNone/>
-            </a:pPr>
-            <a:r>
-              <a:rPr lang="en-US" sz="1600" b="1" dirty="0">
+          <p:cNvPr id="8" name="Text 6"/>
+          <p:cNvSpPr/>
+          <p:nvPr/>
+        </p:nvSpPr>
+        <p:spPr>
+          <a:xfrm>
+            <a:off x="1097280" y="5257800"/>
+            <a:ext cx="10241280" cy="640080"/>
+          </a:xfrm>
+          <a:prstGeom prst="rect">
+            <a:avLst/>
+          </a:prstGeom>
+          <a:noFill/>
+          <a:ln/>
+        </p:spPr>
+        <p:txBody>
+          <a:bodyPr wrap="square" rtlCol="0" anchor="ctr"/>
+          <a:lstStyle/>
+          <a:p>
+            <a:pPr indent="0" marL="0">
+              <a:buNone/>
+            </a:pPr>
+            <a:r>
+              <a:rPr lang="en-US" sz="1400" i="1" dirty="0">
                 <a:solidFill>
                   <a:srgbClr val="5234B7"/>
                 </a:solidFill>
               </a:rPr>
-              <a:t>Professionalism</a:t>
-            </a:r>
-            <a:endParaRPr lang="en-US" sz="1600" dirty="0"/>
-          </a:p>
-        </p:txBody>
-      </p:sp>
-      <p:sp>
-        <p:nvSpPr>
-          <p:cNvPr id="8" name="Shape 6"/>
-          <p:cNvSpPr/>
-          <p:nvPr/>
-        </p:nvSpPr>
-        <p:spPr>
-          <a:xfrm>
-            <a:off x="6537960" y="3474720"/>
-            <a:ext cx="5029200" cy="868680"/>
-          </a:xfrm>
-          <a:prstGeom prst="roundRect">
-            <a:avLst/>
-          </a:prstGeom>
-          <a:solidFill>
-            <a:srgbClr val="F9F5FF"/>
-          </a:solidFill>
-          <a:ln w="12700">
-            <a:solidFill>
-              <a:srgbClr val="D8CCF4"/>
-            </a:solidFill>
-            <a:prstDash val="solid"/>
-          </a:ln>
-        </p:spPr>
+              <a:t>Example ambiguity: "I saw the man with the telescope" can mean either you used a telescope, or the man had one.</a:t>
+            </a:r>
+            <a:endParaRPr lang="en-US" sz="1400" dirty="0"/>
+          </a:p>
+        </p:txBody>
       </p:sp>
       <p:sp>
         <p:nvSpPr>
@@ -1665,165 +1947,7 @@
         </p:nvSpPr>
         <p:spPr>
           <a:xfrm>
-            <a:off x="6858000" y="3730752"/>
-            <a:ext cx="4389120" cy="365760"/>
-          </a:xfrm>
-          <a:prstGeom prst="rect">
-            <a:avLst/>
-          </a:prstGeom>
-          <a:noFill/>
-          <a:ln/>
-        </p:spPr>
-        <p:txBody>
-          <a:bodyPr wrap="square" rtlCol="0" anchor="ctr"/>
-          <a:lstStyle/>
-          <a:p>
-            <a:pPr algn="l" indent="0" marL="0">
-              <a:buNone/>
-            </a:pPr>
-            <a:r>
-              <a:rPr lang="en-US" sz="1600" b="1" dirty="0">
-                <a:solidFill>
-                  <a:srgbClr val="5234B7"/>
-                </a:solidFill>
-              </a:rPr>
-              <a:t>Teamwork</a:t>
-            </a:r>
-            <a:endParaRPr lang="en-US" sz="1600" dirty="0"/>
-          </a:p>
-        </p:txBody>
-      </p:sp>
-      <p:sp>
-        <p:nvSpPr>
-          <p:cNvPr id="10" name="Shape 8"/>
-          <p:cNvSpPr/>
-          <p:nvPr/>
-        </p:nvSpPr>
-        <p:spPr>
-          <a:xfrm>
-            <a:off x="822960" y="4709160"/>
-            <a:ext cx="5029200" cy="868680"/>
-          </a:xfrm>
-          <a:prstGeom prst="roundRect">
-            <a:avLst/>
-          </a:prstGeom>
-          <a:solidFill>
-            <a:srgbClr val="F3EEFF"/>
-          </a:solidFill>
-          <a:ln w="12700">
-            <a:solidFill>
-              <a:srgbClr val="D8CCF4"/>
-            </a:solidFill>
-            <a:prstDash val="solid"/>
-          </a:ln>
-        </p:spPr>
-      </p:sp>
-      <p:sp>
-        <p:nvSpPr>
-          <p:cNvPr id="11" name="Text 9"/>
-          <p:cNvSpPr/>
-          <p:nvPr/>
-        </p:nvSpPr>
-        <p:spPr>
-          <a:xfrm>
-            <a:off x="1143000" y="4965192"/>
-            <a:ext cx="4389120" cy="365760"/>
-          </a:xfrm>
-          <a:prstGeom prst="rect">
-            <a:avLst/>
-          </a:prstGeom>
-          <a:noFill/>
-          <a:ln/>
-        </p:spPr>
-        <p:txBody>
-          <a:bodyPr wrap="square" rtlCol="0" anchor="ctr"/>
-          <a:lstStyle/>
-          <a:p>
-            <a:pPr algn="l" indent="0" marL="0">
-              <a:buNone/>
-            </a:pPr>
-            <a:r>
-              <a:rPr lang="en-US" sz="1600" b="1" dirty="0">
-                <a:solidFill>
-                  <a:srgbClr val="5234B7"/>
-                </a:solidFill>
-              </a:rPr>
-              <a:t>Innovation</a:t>
-            </a:r>
-            <a:endParaRPr lang="en-US" sz="1600" dirty="0"/>
-          </a:p>
-        </p:txBody>
-      </p:sp>
-      <p:sp>
-        <p:nvSpPr>
-          <p:cNvPr id="12" name="Shape 10"/>
-          <p:cNvSpPr/>
-          <p:nvPr/>
-        </p:nvSpPr>
-        <p:spPr>
-          <a:xfrm>
-            <a:off x="6537960" y="4709160"/>
-            <a:ext cx="5029200" cy="868680"/>
-          </a:xfrm>
-          <a:prstGeom prst="roundRect">
-            <a:avLst/>
-          </a:prstGeom>
-          <a:solidFill>
-            <a:srgbClr val="F9F5FF"/>
-          </a:solidFill>
-          <a:ln w="12700">
-            <a:solidFill>
-              <a:srgbClr val="D8CCF4"/>
-            </a:solidFill>
-            <a:prstDash val="solid"/>
-          </a:ln>
-        </p:spPr>
-      </p:sp>
-      <p:sp>
-        <p:nvSpPr>
-          <p:cNvPr id="13" name="Text 11"/>
-          <p:cNvSpPr/>
-          <p:nvPr/>
-        </p:nvSpPr>
-        <p:spPr>
-          <a:xfrm>
-            <a:off x="6858000" y="4965192"/>
-            <a:ext cx="4389120" cy="365760"/>
-          </a:xfrm>
-          <a:prstGeom prst="rect">
-            <a:avLst/>
-          </a:prstGeom>
-          <a:noFill/>
-          <a:ln/>
-        </p:spPr>
-        <p:txBody>
-          <a:bodyPr wrap="square" rtlCol="0" anchor="ctr"/>
-          <a:lstStyle/>
-          <a:p>
-            <a:pPr algn="l" indent="0" marL="0">
-              <a:buNone/>
-            </a:pPr>
-            <a:r>
-              <a:rPr lang="en-US" sz="1600" b="1" dirty="0">
-                <a:solidFill>
-                  <a:srgbClr val="5234B7"/>
-                </a:solidFill>
-              </a:rPr>
-              <a:t>Customer Focus</a:t>
-            </a:r>
-            <a:endParaRPr lang="en-US" sz="1600" dirty="0"/>
-          </a:p>
-        </p:txBody>
-      </p:sp>
-      <p:sp>
-        <p:nvSpPr>
-          <p:cNvPr id="14" name="Text 12"/>
-          <p:cNvSpPr/>
-          <p:nvPr/>
-        </p:nvSpPr>
-        <p:spPr>
-          <a:xfrm>
-            <a:off x="548640" y="6583680"/>
+            <a:off x="548640" y="6537960"/>
             <a:ext cx="10972800" cy="274320"/>
           </a:xfrm>
           <a:prstGeom prst="rect">
@@ -1845,7 +1969,7 @@
                   <a:srgbClr val="9CA3AF"/>
                 </a:solidFill>
               </a:rPr>
-              <a:t>Office Presentation | 2</a:t>
+              <a:t>NLP Day 1 | 2</a:t>
             </a:r>
             <a:endParaRPr lang="en-US" sz="1000" dirty="0"/>
           </a:p>
@@ -1917,7 +2041,7 @@
         <p:spPr>
           <a:xfrm>
             <a:off x="548640" y="201168"/>
-            <a:ext cx="7772400" cy="365760"/>
+            <a:ext cx="9601200" cy="365760"/>
           </a:xfrm>
           <a:prstGeom prst="rect">
             <a:avLst/>
@@ -1938,7 +2062,7 @@
                   <a:srgbClr val="FFFFFF"/>
                 </a:solidFill>
               </a:rPr>
-              <a:t>Main Departments</a:t>
+              <a:t>Real-World NLP Applications</a:t>
             </a:r>
             <a:endParaRPr lang="en-US" sz="2000" dirty="0"/>
           </a:p>
@@ -1953,7 +2077,7 @@
         <p:spPr>
           <a:xfrm>
             <a:off x="548640" y="914400"/>
-            <a:ext cx="11155680" cy="365760"/>
+            <a:ext cx="10972800" cy="365760"/>
           </a:xfrm>
           <a:prstGeom prst="rect">
             <a:avLst/>
@@ -1974,7 +2098,7 @@
                   <a:srgbClr val="7F8C8D"/>
                 </a:solidFill>
               </a:rPr>
-              <a:t>How our office is structured</a:t>
+              <a:t>Where NLP appears in daily products</a:t>
             </a:r>
             <a:endParaRPr lang="en-US" sz="1300" dirty="0"/>
           </a:p>
@@ -1982,28 +2106,115 @@
       </p:sp>
       <p:sp>
         <p:nvSpPr>
-          <p:cNvPr id="5" name="Shape 3"/>
-          <p:cNvSpPr/>
-          <p:nvPr/>
-        </p:nvSpPr>
-        <p:spPr>
-          <a:xfrm>
-            <a:off x="822960" y="1554480"/>
-            <a:ext cx="10607040" cy="914400"/>
-          </a:xfrm>
-          <a:prstGeom prst="roundRect">
-            <a:avLst/>
-          </a:prstGeom>
-          <a:solidFill>
-            <a:srgbClr val="FFFFFF"/>
-          </a:solidFill>
-          <a:ln w="12700">
-            <a:solidFill>
-              <a:srgbClr val="BDC3C7"/>
-            </a:solidFill>
-            <a:prstDash val="solid"/>
-          </a:ln>
-        </p:spPr>
+          <p:cNvPr id="5" name="Text 3"/>
+          <p:cNvSpPr/>
+          <p:nvPr/>
+        </p:nvSpPr>
+        <p:spPr>
+          <a:xfrm>
+            <a:off x="822960" y="1463040"/>
+            <a:ext cx="10972800" cy="4389120"/>
+          </a:xfrm>
+          <a:prstGeom prst="rect">
+            <a:avLst/>
+          </a:prstGeom>
+          <a:noFill/>
+          <a:ln/>
+        </p:spPr>
+        <p:txBody>
+          <a:bodyPr wrap="square" rtlCol="0" anchor="ctr"/>
+          <a:lstStyle/>
+          <a:p>
+            <a:pPr marL="177800" indent="-177800">
+              <a:buSzPct val="100000"/>
+              <a:buChar char="•"/>
+            </a:pPr>
+            <a:r>
+              <a:rPr lang="en-US" sz="1600" dirty="0">
+                <a:solidFill>
+                  <a:srgbClr val="1C2833"/>
+                </a:solidFill>
+              </a:rPr>
+              <a:t>Search engines: understanding user intent behind queries.</a:t>
+            </a:r>
+            <a:endParaRPr lang="en-US" sz="1600" dirty="0"/>
+          </a:p>
+          <a:p>
+            <a:pPr marL="177800" indent="-177800">
+              <a:buSzPct val="100000"/>
+              <a:buChar char="•"/>
+            </a:pPr>
+            <a:r>
+              <a:rPr lang="en-US" sz="1600" dirty="0">
+                <a:solidFill>
+                  <a:srgbClr val="1C2833"/>
+                </a:solidFill>
+              </a:rPr>
+              <a:t>Virtual assistants: speech recognition and command interpretation.</a:t>
+            </a:r>
+            <a:endParaRPr lang="en-US" sz="1600" dirty="0"/>
+          </a:p>
+          <a:p>
+            <a:pPr marL="177800" indent="-177800">
+              <a:buSzPct val="100000"/>
+              <a:buChar char="•"/>
+            </a:pPr>
+            <a:r>
+              <a:rPr lang="en-US" sz="1600" dirty="0">
+                <a:solidFill>
+                  <a:srgbClr val="1C2833"/>
+                </a:solidFill>
+              </a:rPr>
+              <a:t>Machine translation: converting meaning across languages.</a:t>
+            </a:r>
+            <a:endParaRPr lang="en-US" sz="1600" dirty="0"/>
+          </a:p>
+          <a:p>
+            <a:pPr marL="177800" indent="-177800">
+              <a:buSzPct val="100000"/>
+              <a:buChar char="•"/>
+            </a:pPr>
+            <a:r>
+              <a:rPr lang="en-US" sz="1600" dirty="0">
+                <a:solidFill>
+                  <a:srgbClr val="1C2833"/>
+                </a:solidFill>
+              </a:rPr>
+              <a:t>Email systems: spam filtering and smart reply generation.</a:t>
+            </a:r>
+            <a:endParaRPr lang="en-US" sz="1600" dirty="0"/>
+          </a:p>
+          <a:p>
+            <a:pPr marL="177800" indent="-177800">
+              <a:buSzPct val="100000"/>
+              <a:buChar char="•"/>
+            </a:pPr>
+            <a:r>
+              <a:rPr lang="en-US" sz="1600" dirty="0">
+                <a:solidFill>
+                  <a:srgbClr val="1C2833"/>
+                </a:solidFill>
+              </a:rPr>
+              <a:t>Healthcare and finance: extracting structured insights from documents.</a:t>
+            </a:r>
+            <a:endParaRPr lang="en-US" sz="1600" dirty="0"/>
+          </a:p>
+          <a:p>
+            <a:pPr marL="177800" indent="-177800">
+              <a:buSzPct val="100000"/>
+              <a:buChar char="•"/>
+            </a:pPr>
+            <a:r>
+              <a:rPr lang="en-US" sz="1600" dirty="0">
+                <a:solidFill>
+                  <a:srgbClr val="1C2833"/>
+                </a:solidFill>
+              </a:rPr>
+              <a:t>Social media moderation: detecting hate speech, abuse, and misinformation.</a:t>
+            </a:r>
+            <a:endParaRPr lang="en-US" sz="1600" dirty="0"/>
+          </a:p>
+        </p:txBody>
       </p:sp>
       <p:sp>
         <p:nvSpPr>
@@ -2013,370 +2224,7 @@
         </p:nvSpPr>
         <p:spPr>
           <a:xfrm>
-            <a:off x="1097280" y="1700784"/>
-            <a:ext cx="2743200" cy="320040"/>
-          </a:xfrm>
-          <a:prstGeom prst="rect">
-            <a:avLst/>
-          </a:prstGeom>
-          <a:noFill/>
-          <a:ln/>
-        </p:spPr>
-        <p:txBody>
-          <a:bodyPr wrap="square" rtlCol="0" anchor="ctr"/>
-          <a:lstStyle/>
-          <a:p>
-            <a:pPr indent="0" marL="0">
-              <a:buNone/>
-            </a:pPr>
-            <a:r>
-              <a:rPr lang="en-US" sz="1500" b="1" dirty="0">
-                <a:solidFill>
-                  <a:srgbClr val="2C3E50"/>
-                </a:solidFill>
-              </a:rPr>
-              <a:t>Operations</a:t>
-            </a:r>
-            <a:endParaRPr lang="en-US" sz="1500" dirty="0"/>
-          </a:p>
-        </p:txBody>
-      </p:sp>
-      <p:sp>
-        <p:nvSpPr>
-          <p:cNvPr id="7" name="Text 5"/>
-          <p:cNvSpPr/>
-          <p:nvPr/>
-        </p:nvSpPr>
-        <p:spPr>
-          <a:xfrm>
-            <a:off x="3657600" y="1737360"/>
-            <a:ext cx="7223760" cy="320040"/>
-          </a:xfrm>
-          <a:prstGeom prst="rect">
-            <a:avLst/>
-          </a:prstGeom>
-          <a:noFill/>
-          <a:ln/>
-        </p:spPr>
-        <p:txBody>
-          <a:bodyPr wrap="square" rtlCol="0" anchor="ctr"/>
-          <a:lstStyle/>
-          <a:p>
-            <a:pPr indent="0" marL="0">
-              <a:buNone/>
-            </a:pPr>
-            <a:r>
-              <a:rPr lang="en-US" sz="1400" dirty="0">
-                <a:solidFill>
-                  <a:srgbClr val="1C2833"/>
-                </a:solidFill>
-              </a:rPr>
-              <a:t>Ensures smooth day-to-day workflow.</a:t>
-            </a:r>
-            <a:endParaRPr lang="en-US" sz="1400" dirty="0"/>
-          </a:p>
-        </p:txBody>
-      </p:sp>
-      <p:sp>
-        <p:nvSpPr>
-          <p:cNvPr id="8" name="Shape 6"/>
-          <p:cNvSpPr/>
-          <p:nvPr/>
-        </p:nvSpPr>
-        <p:spPr>
-          <a:xfrm>
-            <a:off x="822960" y="2743200"/>
-            <a:ext cx="10607040" cy="914400"/>
-          </a:xfrm>
-          <a:prstGeom prst="roundRect">
-            <a:avLst/>
-          </a:prstGeom>
-          <a:solidFill>
-            <a:srgbClr val="F3EEFF"/>
-          </a:solidFill>
-          <a:ln w="12700">
-            <a:solidFill>
-              <a:srgbClr val="BDC3C7"/>
-            </a:solidFill>
-            <a:prstDash val="solid"/>
-          </a:ln>
-        </p:spPr>
-      </p:sp>
-      <p:sp>
-        <p:nvSpPr>
-          <p:cNvPr id="9" name="Text 7"/>
-          <p:cNvSpPr/>
-          <p:nvPr/>
-        </p:nvSpPr>
-        <p:spPr>
-          <a:xfrm>
-            <a:off x="1097280" y="2889504"/>
-            <a:ext cx="2743200" cy="320040"/>
-          </a:xfrm>
-          <a:prstGeom prst="rect">
-            <a:avLst/>
-          </a:prstGeom>
-          <a:noFill/>
-          <a:ln/>
-        </p:spPr>
-        <p:txBody>
-          <a:bodyPr wrap="square" rtlCol="0" anchor="ctr"/>
-          <a:lstStyle/>
-          <a:p>
-            <a:pPr indent="0" marL="0">
-              <a:buNone/>
-            </a:pPr>
-            <a:r>
-              <a:rPr lang="en-US" sz="1500" b="1" dirty="0">
-                <a:solidFill>
-                  <a:srgbClr val="2C3E50"/>
-                </a:solidFill>
-              </a:rPr>
-              <a:t>Sales</a:t>
-            </a:r>
-            <a:endParaRPr lang="en-US" sz="1500" dirty="0"/>
-          </a:p>
-        </p:txBody>
-      </p:sp>
-      <p:sp>
-        <p:nvSpPr>
-          <p:cNvPr id="10" name="Text 8"/>
-          <p:cNvSpPr/>
-          <p:nvPr/>
-        </p:nvSpPr>
-        <p:spPr>
-          <a:xfrm>
-            <a:off x="3657600" y="2926080"/>
-            <a:ext cx="7223760" cy="320040"/>
-          </a:xfrm>
-          <a:prstGeom prst="rect">
-            <a:avLst/>
-          </a:prstGeom>
-          <a:noFill/>
-          <a:ln/>
-        </p:spPr>
-        <p:txBody>
-          <a:bodyPr wrap="square" rtlCol="0" anchor="ctr"/>
-          <a:lstStyle/>
-          <a:p>
-            <a:pPr indent="0" marL="0">
-              <a:buNone/>
-            </a:pPr>
-            <a:r>
-              <a:rPr lang="en-US" sz="1400" dirty="0">
-                <a:solidFill>
-                  <a:srgbClr val="1C2833"/>
-                </a:solidFill>
-              </a:rPr>
-              <a:t>Builds client relationships and growth.</a:t>
-            </a:r>
-            <a:endParaRPr lang="en-US" sz="1400" dirty="0"/>
-          </a:p>
-        </p:txBody>
-      </p:sp>
-      <p:sp>
-        <p:nvSpPr>
-          <p:cNvPr id="11" name="Shape 9"/>
-          <p:cNvSpPr/>
-          <p:nvPr/>
-        </p:nvSpPr>
-        <p:spPr>
-          <a:xfrm>
-            <a:off x="822960" y="3931920"/>
-            <a:ext cx="10607040" cy="914400"/>
-          </a:xfrm>
-          <a:prstGeom prst="roundRect">
-            <a:avLst/>
-          </a:prstGeom>
-          <a:solidFill>
-            <a:srgbClr val="FFFFFF"/>
-          </a:solidFill>
-          <a:ln w="12700">
-            <a:solidFill>
-              <a:srgbClr val="BDC3C7"/>
-            </a:solidFill>
-            <a:prstDash val="solid"/>
-          </a:ln>
-        </p:spPr>
-      </p:sp>
-      <p:sp>
-        <p:nvSpPr>
-          <p:cNvPr id="12" name="Text 10"/>
-          <p:cNvSpPr/>
-          <p:nvPr/>
-        </p:nvSpPr>
-        <p:spPr>
-          <a:xfrm>
-            <a:off x="1097280" y="4078224"/>
-            <a:ext cx="2743200" cy="320040"/>
-          </a:xfrm>
-          <a:prstGeom prst="rect">
-            <a:avLst/>
-          </a:prstGeom>
-          <a:noFill/>
-          <a:ln/>
-        </p:spPr>
-        <p:txBody>
-          <a:bodyPr wrap="square" rtlCol="0" anchor="ctr"/>
-          <a:lstStyle/>
-          <a:p>
-            <a:pPr indent="0" marL="0">
-              <a:buNone/>
-            </a:pPr>
-            <a:r>
-              <a:rPr lang="en-US" sz="1500" b="1" dirty="0">
-                <a:solidFill>
-                  <a:srgbClr val="2C3E50"/>
-                </a:solidFill>
-              </a:rPr>
-              <a:t>Human Resources</a:t>
-            </a:r>
-            <a:endParaRPr lang="en-US" sz="1500" dirty="0"/>
-          </a:p>
-        </p:txBody>
-      </p:sp>
-      <p:sp>
-        <p:nvSpPr>
-          <p:cNvPr id="13" name="Text 11"/>
-          <p:cNvSpPr/>
-          <p:nvPr/>
-        </p:nvSpPr>
-        <p:spPr>
-          <a:xfrm>
-            <a:off x="3657600" y="4114800"/>
-            <a:ext cx="7223760" cy="320040"/>
-          </a:xfrm>
-          <a:prstGeom prst="rect">
-            <a:avLst/>
-          </a:prstGeom>
-          <a:noFill/>
-          <a:ln/>
-        </p:spPr>
-        <p:txBody>
-          <a:bodyPr wrap="square" rtlCol="0" anchor="ctr"/>
-          <a:lstStyle/>
-          <a:p>
-            <a:pPr indent="0" marL="0">
-              <a:buNone/>
-            </a:pPr>
-            <a:r>
-              <a:rPr lang="en-US" sz="1400" dirty="0">
-                <a:solidFill>
-                  <a:srgbClr val="1C2833"/>
-                </a:solidFill>
-              </a:rPr>
-              <a:t>Supports people and culture.</a:t>
-            </a:r>
-            <a:endParaRPr lang="en-US" sz="1400" dirty="0"/>
-          </a:p>
-        </p:txBody>
-      </p:sp>
-      <p:sp>
-        <p:nvSpPr>
-          <p:cNvPr id="14" name="Shape 12"/>
-          <p:cNvSpPr/>
-          <p:nvPr/>
-        </p:nvSpPr>
-        <p:spPr>
-          <a:xfrm>
-            <a:off x="822960" y="5120640"/>
-            <a:ext cx="10607040" cy="914400"/>
-          </a:xfrm>
-          <a:prstGeom prst="roundRect">
-            <a:avLst/>
-          </a:prstGeom>
-          <a:solidFill>
-            <a:srgbClr val="F3EEFF"/>
-          </a:solidFill>
-          <a:ln w="12700">
-            <a:solidFill>
-              <a:srgbClr val="BDC3C7"/>
-            </a:solidFill>
-            <a:prstDash val="solid"/>
-          </a:ln>
-        </p:spPr>
-      </p:sp>
-      <p:sp>
-        <p:nvSpPr>
-          <p:cNvPr id="15" name="Text 13"/>
-          <p:cNvSpPr/>
-          <p:nvPr/>
-        </p:nvSpPr>
-        <p:spPr>
-          <a:xfrm>
-            <a:off x="1097280" y="5266944"/>
-            <a:ext cx="2743200" cy="320040"/>
-          </a:xfrm>
-          <a:prstGeom prst="rect">
-            <a:avLst/>
-          </a:prstGeom>
-          <a:noFill/>
-          <a:ln/>
-        </p:spPr>
-        <p:txBody>
-          <a:bodyPr wrap="square" rtlCol="0" anchor="ctr"/>
-          <a:lstStyle/>
-          <a:p>
-            <a:pPr indent="0" marL="0">
-              <a:buNone/>
-            </a:pPr>
-            <a:r>
-              <a:rPr lang="en-US" sz="1500" b="1" dirty="0">
-                <a:solidFill>
-                  <a:srgbClr val="2C3E50"/>
-                </a:solidFill>
-              </a:rPr>
-              <a:t>Finance</a:t>
-            </a:r>
-            <a:endParaRPr lang="en-US" sz="1500" dirty="0"/>
-          </a:p>
-        </p:txBody>
-      </p:sp>
-      <p:sp>
-        <p:nvSpPr>
-          <p:cNvPr id="16" name="Text 14"/>
-          <p:cNvSpPr/>
-          <p:nvPr/>
-        </p:nvSpPr>
-        <p:spPr>
-          <a:xfrm>
-            <a:off x="3657600" y="5303520"/>
-            <a:ext cx="7223760" cy="320040"/>
-          </a:xfrm>
-          <a:prstGeom prst="rect">
-            <a:avLst/>
-          </a:prstGeom>
-          <a:noFill/>
-          <a:ln/>
-        </p:spPr>
-        <p:txBody>
-          <a:bodyPr wrap="square" rtlCol="0" anchor="ctr"/>
-          <a:lstStyle/>
-          <a:p>
-            <a:pPr indent="0" marL="0">
-              <a:buNone/>
-            </a:pPr>
-            <a:r>
-              <a:rPr lang="en-US" sz="1400" dirty="0">
-                <a:solidFill>
-                  <a:srgbClr val="1C2833"/>
-                </a:solidFill>
-              </a:rPr>
-              <a:t>Manages budgets and financial planning.</a:t>
-            </a:r>
-            <a:endParaRPr lang="en-US" sz="1400" dirty="0"/>
-          </a:p>
-        </p:txBody>
-      </p:sp>
-      <p:sp>
-        <p:nvSpPr>
-          <p:cNvPr id="17" name="Text 15"/>
-          <p:cNvSpPr/>
-          <p:nvPr/>
-        </p:nvSpPr>
-        <p:spPr>
-          <a:xfrm>
-            <a:off x="548640" y="6583680"/>
+            <a:off x="548640" y="6537960"/>
             <a:ext cx="10972800" cy="274320"/>
           </a:xfrm>
           <a:prstGeom prst="rect">
@@ -2398,7 +2246,7 @@
                   <a:srgbClr val="9CA3AF"/>
                 </a:solidFill>
               </a:rPr>
-              <a:t>Office Presentation | 3</a:t>
+              <a:t>NLP Day 1 | 3</a:t>
             </a:r>
             <a:endParaRPr lang="en-US" sz="1000" dirty="0"/>
           </a:p>
@@ -2470,7 +2318,7 @@
         <p:spPr>
           <a:xfrm>
             <a:off x="548640" y="201168"/>
-            <a:ext cx="7772400" cy="365760"/>
+            <a:ext cx="9601200" cy="365760"/>
           </a:xfrm>
           <a:prstGeom prst="rect">
             <a:avLst/>
@@ -2491,7 +2339,7 @@
                   <a:srgbClr val="FFFFFF"/>
                 </a:solidFill>
               </a:rPr>
-              <a:t>Daily Workflow</a:t>
+              <a:t>The Full NLP Pipeline</a:t>
             </a:r>
             <a:endParaRPr lang="en-US" sz="2000" dirty="0"/>
           </a:p>
@@ -2506,7 +2354,7 @@
         <p:spPr>
           <a:xfrm>
             <a:off x="548640" y="914400"/>
-            <a:ext cx="11155680" cy="365760"/>
+            <a:ext cx="10972800" cy="365760"/>
           </a:xfrm>
           <a:prstGeom prst="rect">
             <a:avLst/>
@@ -2527,7 +2375,7 @@
                   <a:srgbClr val="7F8C8D"/>
                 </a:solidFill>
               </a:rPr>
-              <a:t>A typical productive day</a:t>
+              <a:t>From raw text to structured data</a:t>
             </a:r>
             <a:endParaRPr lang="en-US" sz="1300" dirty="0"/>
           </a:p>
@@ -2541,18 +2389,18 @@
         </p:nvSpPr>
         <p:spPr>
           <a:xfrm>
-            <a:off x="914400" y="1828800"/>
-            <a:ext cx="777240" cy="777240"/>
-          </a:xfrm>
-          <a:prstGeom prst="ellipse">
+            <a:off x="914400" y="1554480"/>
+            <a:ext cx="4572000" cy="502920"/>
+          </a:xfrm>
+          <a:prstGeom prst="roundRect">
             <a:avLst/>
           </a:prstGeom>
           <a:solidFill>
-            <a:srgbClr val="5234B7"/>
+            <a:srgbClr val="FFFFFF"/>
           </a:solidFill>
           <a:ln w="12700">
             <a:solidFill>
-              <a:srgbClr val="5234B7"/>
+              <a:srgbClr val="BDC3C7"/>
             </a:solidFill>
             <a:prstDash val="solid"/>
           </a:ln>
@@ -2566,44 +2414,8 @@
         </p:nvSpPr>
         <p:spPr>
           <a:xfrm>
-            <a:off x="914400" y="2048256"/>
-            <a:ext cx="777240" cy="228600"/>
-          </a:xfrm>
-          <a:prstGeom prst="rect">
-            <a:avLst/>
-          </a:prstGeom>
-          <a:noFill/>
-          <a:ln/>
-        </p:spPr>
-        <p:txBody>
-          <a:bodyPr wrap="square" rtlCol="0" anchor="ctr"/>
-          <a:lstStyle/>
-          <a:p>
-            <a:pPr algn="ctr" indent="0" marL="0">
-              <a:buNone/>
-            </a:pPr>
-            <a:r>
-              <a:rPr lang="en-US" sz="1400" b="1" dirty="0">
-                <a:solidFill>
-                  <a:srgbClr val="FFFFFF"/>
-                </a:solidFill>
-              </a:rPr>
-              <a:t>1</a:t>
-            </a:r>
-            <a:endParaRPr lang="en-US" sz="1400" dirty="0"/>
-          </a:p>
-        </p:txBody>
-      </p:sp>
-      <p:sp>
-        <p:nvSpPr>
-          <p:cNvPr id="7" name="Text 5"/>
-          <p:cNvSpPr/>
-          <p:nvPr/>
-        </p:nvSpPr>
-        <p:spPr>
-          <a:xfrm>
-            <a:off x="1920240" y="1901952"/>
-            <a:ext cx="1188720" cy="274320"/>
+            <a:off x="1097280" y="1691640"/>
+            <a:ext cx="4206240" cy="228600"/>
           </a:xfrm>
           <a:prstGeom prst="rect">
             <a:avLst/>
@@ -2624,7 +2436,7 @@
                   <a:srgbClr val="2C3E50"/>
                 </a:solidFill>
               </a:rPr>
-              <a:t>09:00</a:t>
+              <a:t>1) Text Cleaning</a:t>
             </a:r>
             <a:endParaRPr lang="en-US" sz="1300" dirty="0"/>
           </a:p>
@@ -2632,60 +2444,24 @@
       </p:sp>
       <p:sp>
         <p:nvSpPr>
-          <p:cNvPr id="8" name="Text 6"/>
-          <p:cNvSpPr/>
-          <p:nvPr/>
-        </p:nvSpPr>
-        <p:spPr>
-          <a:xfrm>
-            <a:off x="3017520" y="1901952"/>
-            <a:ext cx="8046720" cy="274320"/>
-          </a:xfrm>
-          <a:prstGeom prst="rect">
-            <a:avLst/>
-          </a:prstGeom>
-          <a:noFill/>
-          <a:ln/>
-        </p:spPr>
-        <p:txBody>
-          <a:bodyPr wrap="square" rtlCol="0" anchor="ctr"/>
-          <a:lstStyle/>
-          <a:p>
-            <a:pPr indent="0" marL="0">
-              <a:buNone/>
-            </a:pPr>
-            <a:r>
-              <a:rPr lang="en-US" sz="1400" dirty="0">
-                <a:solidFill>
-                  <a:srgbClr val="1C2833"/>
-                </a:solidFill>
-              </a:rPr>
-              <a:t>Team Stand-up &amp; Priority Setting</a:t>
-            </a:r>
-            <a:endParaRPr lang="en-US" sz="1400" dirty="0"/>
-          </a:p>
-        </p:txBody>
-      </p:sp>
-      <p:sp>
-        <p:nvSpPr>
-          <p:cNvPr id="9" name="Shape 7"/>
-          <p:cNvSpPr/>
-          <p:nvPr/>
-        </p:nvSpPr>
-        <p:spPr>
-          <a:xfrm>
-            <a:off x="914400" y="2971800"/>
-            <a:ext cx="777240" cy="777240"/>
-          </a:xfrm>
-          <a:prstGeom prst="ellipse">
+          <p:cNvPr id="7" name="Shape 5"/>
+          <p:cNvSpPr/>
+          <p:nvPr/>
+        </p:nvSpPr>
+        <p:spPr>
+          <a:xfrm>
+            <a:off x="914400" y="2231136"/>
+            <a:ext cx="4572000" cy="502920"/>
+          </a:xfrm>
+          <a:prstGeom prst="roundRect">
             <a:avLst/>
           </a:prstGeom>
           <a:solidFill>
-            <a:srgbClr val="5234B7"/>
+            <a:srgbClr val="F8FAFC"/>
           </a:solidFill>
           <a:ln w="12700">
             <a:solidFill>
-              <a:srgbClr val="5234B7"/>
+              <a:srgbClr val="BDC3C7"/>
             </a:solidFill>
             <a:prstDash val="solid"/>
           </a:ln>
@@ -2693,50 +2469,14 @@
       </p:sp>
       <p:sp>
         <p:nvSpPr>
-          <p:cNvPr id="10" name="Text 8"/>
-          <p:cNvSpPr/>
-          <p:nvPr/>
-        </p:nvSpPr>
-        <p:spPr>
-          <a:xfrm>
-            <a:off x="914400" y="3191256"/>
-            <a:ext cx="777240" cy="228600"/>
-          </a:xfrm>
-          <a:prstGeom prst="rect">
-            <a:avLst/>
-          </a:prstGeom>
-          <a:noFill/>
-          <a:ln/>
-        </p:spPr>
-        <p:txBody>
-          <a:bodyPr wrap="square" rtlCol="0" anchor="ctr"/>
-          <a:lstStyle/>
-          <a:p>
-            <a:pPr algn="ctr" indent="0" marL="0">
-              <a:buNone/>
-            </a:pPr>
-            <a:r>
-              <a:rPr lang="en-US" sz="1400" b="1" dirty="0">
-                <a:solidFill>
-                  <a:srgbClr val="FFFFFF"/>
-                </a:solidFill>
-              </a:rPr>
-              <a:t>2</a:t>
-            </a:r>
-            <a:endParaRPr lang="en-US" sz="1400" dirty="0"/>
-          </a:p>
-        </p:txBody>
-      </p:sp>
-      <p:sp>
-        <p:nvSpPr>
-          <p:cNvPr id="11" name="Text 9"/>
-          <p:cNvSpPr/>
-          <p:nvPr/>
-        </p:nvSpPr>
-        <p:spPr>
-          <a:xfrm>
-            <a:off x="1920240" y="3044952"/>
-            <a:ext cx="1188720" cy="274320"/>
+          <p:cNvPr id="8" name="Text 6"/>
+          <p:cNvSpPr/>
+          <p:nvPr/>
+        </p:nvSpPr>
+        <p:spPr>
+          <a:xfrm>
+            <a:off x="1097280" y="2368296"/>
+            <a:ext cx="4206240" cy="228600"/>
           </a:xfrm>
           <a:prstGeom prst="rect">
             <a:avLst/>
@@ -2757,7 +2497,7 @@
                   <a:srgbClr val="2C3E50"/>
                 </a:solidFill>
               </a:rPr>
-              <a:t>11:00</a:t>
+              <a:t>2) Tokenization</a:t>
             </a:r>
             <a:endParaRPr lang="en-US" sz="1300" dirty="0"/>
           </a:p>
@@ -2765,60 +2505,24 @@
       </p:sp>
       <p:sp>
         <p:nvSpPr>
-          <p:cNvPr id="12" name="Text 10"/>
-          <p:cNvSpPr/>
-          <p:nvPr/>
-        </p:nvSpPr>
-        <p:spPr>
-          <a:xfrm>
-            <a:off x="3017520" y="3044952"/>
-            <a:ext cx="8046720" cy="274320"/>
-          </a:xfrm>
-          <a:prstGeom prst="rect">
-            <a:avLst/>
-          </a:prstGeom>
-          <a:noFill/>
-          <a:ln/>
-        </p:spPr>
-        <p:txBody>
-          <a:bodyPr wrap="square" rtlCol="0" anchor="ctr"/>
-          <a:lstStyle/>
-          <a:p>
-            <a:pPr indent="0" marL="0">
-              <a:buNone/>
-            </a:pPr>
-            <a:r>
-              <a:rPr lang="en-US" sz="1400" dirty="0">
-                <a:solidFill>
-                  <a:srgbClr val="1C2833"/>
-                </a:solidFill>
-              </a:rPr>
-              <a:t>Client Communication &amp; Follow-ups</a:t>
-            </a:r>
-            <a:endParaRPr lang="en-US" sz="1400" dirty="0"/>
-          </a:p>
-        </p:txBody>
-      </p:sp>
-      <p:sp>
-        <p:nvSpPr>
-          <p:cNvPr id="13" name="Shape 11"/>
-          <p:cNvSpPr/>
-          <p:nvPr/>
-        </p:nvSpPr>
-        <p:spPr>
-          <a:xfrm>
-            <a:off x="914400" y="4114800"/>
-            <a:ext cx="777240" cy="777240"/>
-          </a:xfrm>
-          <a:prstGeom prst="ellipse">
+          <p:cNvPr id="9" name="Shape 7"/>
+          <p:cNvSpPr/>
+          <p:nvPr/>
+        </p:nvSpPr>
+        <p:spPr>
+          <a:xfrm>
+            <a:off x="914400" y="2907792"/>
+            <a:ext cx="4572000" cy="502920"/>
+          </a:xfrm>
+          <a:prstGeom prst="roundRect">
             <a:avLst/>
           </a:prstGeom>
           <a:solidFill>
-            <a:srgbClr val="5234B7"/>
+            <a:srgbClr val="FFFFFF"/>
           </a:solidFill>
           <a:ln w="12700">
             <a:solidFill>
-              <a:srgbClr val="5234B7"/>
+              <a:srgbClr val="BDC3C7"/>
             </a:solidFill>
             <a:prstDash val="solid"/>
           </a:ln>
@@ -2826,50 +2530,14 @@
       </p:sp>
       <p:sp>
         <p:nvSpPr>
-          <p:cNvPr id="14" name="Text 12"/>
-          <p:cNvSpPr/>
-          <p:nvPr/>
-        </p:nvSpPr>
-        <p:spPr>
-          <a:xfrm>
-            <a:off x="914400" y="4334256"/>
-            <a:ext cx="777240" cy="228600"/>
-          </a:xfrm>
-          <a:prstGeom prst="rect">
-            <a:avLst/>
-          </a:prstGeom>
-          <a:noFill/>
-          <a:ln/>
-        </p:spPr>
-        <p:txBody>
-          <a:bodyPr wrap="square" rtlCol="0" anchor="ctr"/>
-          <a:lstStyle/>
-          <a:p>
-            <a:pPr algn="ctr" indent="0" marL="0">
-              <a:buNone/>
-            </a:pPr>
-            <a:r>
-              <a:rPr lang="en-US" sz="1400" b="1" dirty="0">
-                <a:solidFill>
-                  <a:srgbClr val="FFFFFF"/>
-                </a:solidFill>
-              </a:rPr>
-              <a:t>3</a:t>
-            </a:r>
-            <a:endParaRPr lang="en-US" sz="1400" dirty="0"/>
-          </a:p>
-        </p:txBody>
-      </p:sp>
-      <p:sp>
-        <p:nvSpPr>
-          <p:cNvPr id="15" name="Text 13"/>
-          <p:cNvSpPr/>
-          <p:nvPr/>
-        </p:nvSpPr>
-        <p:spPr>
-          <a:xfrm>
-            <a:off x="1920240" y="4187952"/>
-            <a:ext cx="1188720" cy="274320"/>
+          <p:cNvPr id="10" name="Text 8"/>
+          <p:cNvSpPr/>
+          <p:nvPr/>
+        </p:nvSpPr>
+        <p:spPr>
+          <a:xfrm>
+            <a:off x="1097280" y="3044952"/>
+            <a:ext cx="4206240" cy="228600"/>
           </a:xfrm>
           <a:prstGeom prst="rect">
             <a:avLst/>
@@ -2890,7 +2558,7 @@
                   <a:srgbClr val="2C3E50"/>
                 </a:solidFill>
               </a:rPr>
-              <a:t>13:00</a:t>
+              <a:t>3) Stop Words Handling</a:t>
             </a:r>
             <a:endParaRPr lang="en-US" sz="1300" dirty="0"/>
           </a:p>
@@ -2898,60 +2566,24 @@
       </p:sp>
       <p:sp>
         <p:nvSpPr>
-          <p:cNvPr id="16" name="Text 14"/>
-          <p:cNvSpPr/>
-          <p:nvPr/>
-        </p:nvSpPr>
-        <p:spPr>
-          <a:xfrm>
-            <a:off x="3017520" y="4187952"/>
-            <a:ext cx="8046720" cy="274320"/>
-          </a:xfrm>
-          <a:prstGeom prst="rect">
-            <a:avLst/>
-          </a:prstGeom>
-          <a:noFill/>
-          <a:ln/>
-        </p:spPr>
-        <p:txBody>
-          <a:bodyPr wrap="square" rtlCol="0" anchor="ctr"/>
-          <a:lstStyle/>
-          <a:p>
-            <a:pPr indent="0" marL="0">
-              <a:buNone/>
-            </a:pPr>
-            <a:r>
-              <a:rPr lang="en-US" sz="1400" dirty="0">
-                <a:solidFill>
-                  <a:srgbClr val="1C2833"/>
-                </a:solidFill>
-              </a:rPr>
-              <a:t>Project Execution &amp; Collaboration</a:t>
-            </a:r>
-            <a:endParaRPr lang="en-US" sz="1400" dirty="0"/>
-          </a:p>
-        </p:txBody>
-      </p:sp>
-      <p:sp>
-        <p:nvSpPr>
-          <p:cNvPr id="17" name="Shape 15"/>
-          <p:cNvSpPr/>
-          <p:nvPr/>
-        </p:nvSpPr>
-        <p:spPr>
-          <a:xfrm>
-            <a:off x="914400" y="5257800"/>
-            <a:ext cx="777240" cy="777240"/>
-          </a:xfrm>
-          <a:prstGeom prst="ellipse">
+          <p:cNvPr id="11" name="Shape 9"/>
+          <p:cNvSpPr/>
+          <p:nvPr/>
+        </p:nvSpPr>
+        <p:spPr>
+          <a:xfrm>
+            <a:off x="914400" y="3584448"/>
+            <a:ext cx="4572000" cy="502920"/>
+          </a:xfrm>
+          <a:prstGeom prst="roundRect">
             <a:avLst/>
           </a:prstGeom>
           <a:solidFill>
-            <a:srgbClr val="5234B7"/>
+            <a:srgbClr val="F8FAFC"/>
           </a:solidFill>
           <a:ln w="12700">
             <a:solidFill>
-              <a:srgbClr val="5234B7"/>
+              <a:srgbClr val="BDC3C7"/>
             </a:solidFill>
             <a:prstDash val="solid"/>
           </a:ln>
@@ -2959,50 +2591,197 @@
       </p:sp>
       <p:sp>
         <p:nvSpPr>
+          <p:cNvPr id="12" name="Text 10"/>
+          <p:cNvSpPr/>
+          <p:nvPr/>
+        </p:nvSpPr>
+        <p:spPr>
+          <a:xfrm>
+            <a:off x="1097280" y="3721608"/>
+            <a:ext cx="4206240" cy="228600"/>
+          </a:xfrm>
+          <a:prstGeom prst="rect">
+            <a:avLst/>
+          </a:prstGeom>
+          <a:noFill/>
+          <a:ln/>
+        </p:spPr>
+        <p:txBody>
+          <a:bodyPr wrap="square" rtlCol="0" anchor="ctr"/>
+          <a:lstStyle/>
+          <a:p>
+            <a:pPr indent="0" marL="0">
+              <a:buNone/>
+            </a:pPr>
+            <a:r>
+              <a:rPr lang="en-US" sz="1300" b="1" dirty="0">
+                <a:solidFill>
+                  <a:srgbClr val="2C3E50"/>
+                </a:solidFill>
+              </a:rPr>
+              <a:t>4) Normalization</a:t>
+            </a:r>
+            <a:endParaRPr lang="en-US" sz="1300" dirty="0"/>
+          </a:p>
+        </p:txBody>
+      </p:sp>
+      <p:sp>
+        <p:nvSpPr>
+          <p:cNvPr id="13" name="Shape 11"/>
+          <p:cNvSpPr/>
+          <p:nvPr/>
+        </p:nvSpPr>
+        <p:spPr>
+          <a:xfrm>
+            <a:off x="914400" y="4261104"/>
+            <a:ext cx="4572000" cy="502920"/>
+          </a:xfrm>
+          <a:prstGeom prst="roundRect">
+            <a:avLst/>
+          </a:prstGeom>
+          <a:solidFill>
+            <a:srgbClr val="FFFFFF"/>
+          </a:solidFill>
+          <a:ln w="12700">
+            <a:solidFill>
+              <a:srgbClr val="BDC3C7"/>
+            </a:solidFill>
+            <a:prstDash val="solid"/>
+          </a:ln>
+        </p:spPr>
+      </p:sp>
+      <p:sp>
+        <p:nvSpPr>
+          <p:cNvPr id="14" name="Text 12"/>
+          <p:cNvSpPr/>
+          <p:nvPr/>
+        </p:nvSpPr>
+        <p:spPr>
+          <a:xfrm>
+            <a:off x="1097280" y="4398264"/>
+            <a:ext cx="4206240" cy="228600"/>
+          </a:xfrm>
+          <a:prstGeom prst="rect">
+            <a:avLst/>
+          </a:prstGeom>
+          <a:noFill/>
+          <a:ln/>
+        </p:spPr>
+        <p:txBody>
+          <a:bodyPr wrap="square" rtlCol="0" anchor="ctr"/>
+          <a:lstStyle/>
+          <a:p>
+            <a:pPr indent="0" marL="0">
+              <a:buNone/>
+            </a:pPr>
+            <a:r>
+              <a:rPr lang="en-US" sz="1300" b="1" dirty="0">
+                <a:solidFill>
+                  <a:srgbClr val="2C3E50"/>
+                </a:solidFill>
+              </a:rPr>
+              <a:t>5) Stemming or Lemmatization</a:t>
+            </a:r>
+            <a:endParaRPr lang="en-US" sz="1300" dirty="0"/>
+          </a:p>
+        </p:txBody>
+      </p:sp>
+      <p:sp>
+        <p:nvSpPr>
+          <p:cNvPr id="15" name="Shape 13"/>
+          <p:cNvSpPr/>
+          <p:nvPr/>
+        </p:nvSpPr>
+        <p:spPr>
+          <a:xfrm>
+            <a:off x="914400" y="4937760"/>
+            <a:ext cx="4572000" cy="502920"/>
+          </a:xfrm>
+          <a:prstGeom prst="roundRect">
+            <a:avLst/>
+          </a:prstGeom>
+          <a:solidFill>
+            <a:srgbClr val="F8FAFC"/>
+          </a:solidFill>
+          <a:ln w="12700">
+            <a:solidFill>
+              <a:srgbClr val="BDC3C7"/>
+            </a:solidFill>
+            <a:prstDash val="solid"/>
+          </a:ln>
+        </p:spPr>
+      </p:sp>
+      <p:sp>
+        <p:nvSpPr>
+          <p:cNvPr id="16" name="Text 14"/>
+          <p:cNvSpPr/>
+          <p:nvPr/>
+        </p:nvSpPr>
+        <p:spPr>
+          <a:xfrm>
+            <a:off x="1097280" y="5074920"/>
+            <a:ext cx="4206240" cy="228600"/>
+          </a:xfrm>
+          <a:prstGeom prst="rect">
+            <a:avLst/>
+          </a:prstGeom>
+          <a:noFill/>
+          <a:ln/>
+        </p:spPr>
+        <p:txBody>
+          <a:bodyPr wrap="square" rtlCol="0" anchor="ctr"/>
+          <a:lstStyle/>
+          <a:p>
+            <a:pPr indent="0" marL="0">
+              <a:buNone/>
+            </a:pPr>
+            <a:r>
+              <a:rPr lang="en-US" sz="1300" b="1" dirty="0">
+                <a:solidFill>
+                  <a:srgbClr val="2C3E50"/>
+                </a:solidFill>
+              </a:rPr>
+              <a:t>6) POS Tagging</a:t>
+            </a:r>
+            <a:endParaRPr lang="en-US" sz="1300" dirty="0"/>
+          </a:p>
+        </p:txBody>
+      </p:sp>
+      <p:sp>
+        <p:nvSpPr>
+          <p:cNvPr id="17" name="Shape 15"/>
+          <p:cNvSpPr/>
+          <p:nvPr/>
+        </p:nvSpPr>
+        <p:spPr>
+          <a:xfrm>
+            <a:off x="914400" y="5614416"/>
+            <a:ext cx="4572000" cy="502920"/>
+          </a:xfrm>
+          <a:prstGeom prst="roundRect">
+            <a:avLst/>
+          </a:prstGeom>
+          <a:solidFill>
+            <a:srgbClr val="FFFFFF"/>
+          </a:solidFill>
+          <a:ln w="12700">
+            <a:solidFill>
+              <a:srgbClr val="BDC3C7"/>
+            </a:solidFill>
+            <a:prstDash val="solid"/>
+          </a:ln>
+        </p:spPr>
+      </p:sp>
+      <p:sp>
+        <p:nvSpPr>
           <p:cNvPr id="18" name="Text 16"/>
           <p:cNvSpPr/>
           <p:nvPr/>
         </p:nvSpPr>
         <p:spPr>
           <a:xfrm>
-            <a:off x="914400" y="5477256"/>
-            <a:ext cx="777240" cy="228600"/>
-          </a:xfrm>
-          <a:prstGeom prst="rect">
-            <a:avLst/>
-          </a:prstGeom>
-          <a:noFill/>
-          <a:ln/>
-        </p:spPr>
-        <p:txBody>
-          <a:bodyPr wrap="square" rtlCol="0" anchor="ctr"/>
-          <a:lstStyle/>
-          <a:p>
-            <a:pPr algn="ctr" indent="0" marL="0">
-              <a:buNone/>
-            </a:pPr>
-            <a:r>
-              <a:rPr lang="en-US" sz="1400" b="1" dirty="0">
-                <a:solidFill>
-                  <a:srgbClr val="FFFFFF"/>
-                </a:solidFill>
-              </a:rPr>
-              <a:t>4</a:t>
-            </a:r>
-            <a:endParaRPr lang="en-US" sz="1400" dirty="0"/>
-          </a:p>
-        </p:txBody>
-      </p:sp>
-      <p:sp>
-        <p:nvSpPr>
-          <p:cNvPr id="19" name="Text 17"/>
-          <p:cNvSpPr/>
-          <p:nvPr/>
-        </p:nvSpPr>
-        <p:spPr>
-          <a:xfrm>
-            <a:off x="1920240" y="5330952"/>
-            <a:ext cx="1188720" cy="274320"/>
+            <a:off x="1097280" y="5751576"/>
+            <a:ext cx="4206240" cy="228600"/>
           </a:xfrm>
           <a:prstGeom prst="rect">
             <a:avLst/>
@@ -3023,7 +2802,7 @@
                   <a:srgbClr val="2C3E50"/>
                 </a:solidFill>
               </a:rPr>
-              <a:t>16:00</a:t>
+              <a:t>7) Named Entity Recognition</a:t>
             </a:r>
             <a:endParaRPr lang="en-US" sz="1300" dirty="0"/>
           </a:p>
@@ -3031,14 +2810,39 @@
       </p:sp>
       <p:sp>
         <p:nvSpPr>
+          <p:cNvPr id="19" name="Shape 17"/>
+          <p:cNvSpPr/>
+          <p:nvPr/>
+        </p:nvSpPr>
+        <p:spPr>
+          <a:xfrm>
+            <a:off x="5852160" y="1645920"/>
+            <a:ext cx="5303520" cy="4206240"/>
+          </a:xfrm>
+          <a:prstGeom prst="roundRect">
+            <a:avLst/>
+          </a:prstGeom>
+          <a:solidFill>
+            <a:srgbClr val="FFFFFF"/>
+          </a:solidFill>
+          <a:ln w="12700">
+            <a:solidFill>
+              <a:srgbClr val="BDC3C7"/>
+            </a:solidFill>
+            <a:prstDash val="solid"/>
+          </a:ln>
+        </p:spPr>
+      </p:sp>
+      <p:sp>
+        <p:nvSpPr>
           <p:cNvPr id="20" name="Text 18"/>
           <p:cNvSpPr/>
           <p:nvPr/>
         </p:nvSpPr>
         <p:spPr>
           <a:xfrm>
-            <a:off x="3017520" y="5330952"/>
-            <a:ext cx="8046720" cy="274320"/>
+            <a:off x="6126480" y="1874520"/>
+            <a:ext cx="4754880" cy="274320"/>
           </a:xfrm>
           <a:prstGeom prst="rect">
             <a:avLst/>
@@ -3054,26 +2858,76 @@
               <a:buNone/>
             </a:pPr>
             <a:r>
-              <a:rPr lang="en-US" sz="1400" dirty="0">
+              <a:rPr lang="en-US" sz="1500" b="1" dirty="0">
+                <a:solidFill>
+                  <a:srgbClr val="5234B7"/>
+                </a:solidFill>
+              </a:rPr>
+              <a:t>Example Flow</a:t>
+            </a:r>
+            <a:endParaRPr lang="en-US" sz="1500" dirty="0"/>
+          </a:p>
+        </p:txBody>
+      </p:sp>
+      <p:sp>
+        <p:nvSpPr>
+          <p:cNvPr id="21" name="Text 19"/>
+          <p:cNvSpPr/>
+          <p:nvPr/>
+        </p:nvSpPr>
+        <p:spPr>
+          <a:xfrm>
+            <a:off x="6126480" y="2240280"/>
+            <a:ext cx="4663440" cy="2103120"/>
+          </a:xfrm>
+          <a:prstGeom prst="rect">
+            <a:avLst/>
+          </a:prstGeom>
+          <a:noFill/>
+          <a:ln/>
+        </p:spPr>
+        <p:txBody>
+          <a:bodyPr wrap="square" rtlCol="0" anchor="t"/>
+          <a:lstStyle/>
+          <a:p>
+            <a:pPr indent="0" marL="0">
+              <a:buNone/>
+            </a:pPr>
+            <a:r>
+              <a:rPr lang="en-US" sz="1300" dirty="0">
                 <a:solidFill>
                   <a:srgbClr val="1C2833"/>
                 </a:solidFill>
               </a:rPr>
-              <a:t>Reporting and Next-Day Planning</a:t>
-            </a:r>
-            <a:endParaRPr lang="en-US" sz="1400" dirty="0"/>
-          </a:p>
-        </p:txBody>
-      </p:sp>
-      <p:sp>
-        <p:nvSpPr>
-          <p:cNvPr id="21" name="Text 19"/>
-          <p:cNvSpPr/>
-          <p:nvPr/>
-        </p:nvSpPr>
-        <p:spPr>
-          <a:xfrm>
-            <a:off x="548640" y="6583680"/>
+              <a:t>Input: "Apple CEO Tim Cook said iPhone sales rose 20% last quarter."</a:t>
+            </a:r>
+            <a:endParaRPr lang="en-US" sz="1300" dirty="0"/>
+          </a:p>
+          <a:p>
+            <a:pPr indent="0" marL="0">
+              <a:buNone/>
+            </a:pPr>
+            <a:r>
+              <a:rPr lang="en-US" sz="1300" dirty="0">
+                <a:solidFill>
+                  <a:srgbClr val="1C2833"/>
+                </a:solidFill>
+              </a:rPr>
+              <a:t>Output: entities, key terms, grammatical roles, and normalized tokens ready for analysis.</a:t>
+            </a:r>
+            <a:endParaRPr lang="en-US" sz="1300" dirty="0"/>
+          </a:p>
+        </p:txBody>
+      </p:sp>
+      <p:sp>
+        <p:nvSpPr>
+          <p:cNvPr id="22" name="Text 20"/>
+          <p:cNvSpPr/>
+          <p:nvPr/>
+        </p:nvSpPr>
+        <p:spPr>
+          <a:xfrm>
+            <a:off x="548640" y="6537960"/>
             <a:ext cx="10972800" cy="274320"/>
           </a:xfrm>
           <a:prstGeom prst="rect">
@@ -3095,7 +2949,7 @@
                   <a:srgbClr val="9CA3AF"/>
                 </a:solidFill>
               </a:rPr>
-              <a:t>Office Presentation | 4</a:t>
+              <a:t>NLP Day 1 | 4</a:t>
             </a:r>
             <a:endParaRPr lang="en-US" sz="1000" dirty="0"/>
           </a:p>
@@ -3135,14 +2989,1305 @@
       </p:grpSpPr>
       <p:sp>
         <p:nvSpPr>
+          <p:cNvPr id="2" name="Shape 0"/>
+          <p:cNvSpPr/>
+          <p:nvPr/>
+        </p:nvSpPr>
+        <p:spPr>
+          <a:xfrm>
+            <a:off x="0" y="0"/>
+            <a:ext cx="12188952" cy="822960"/>
+          </a:xfrm>
+          <a:prstGeom prst="rect">
+            <a:avLst/>
+          </a:prstGeom>
+          <a:solidFill>
+            <a:srgbClr val="2C3E50"/>
+          </a:solidFill>
+          <a:ln w="12700">
+            <a:solidFill>
+              <a:srgbClr val="2C3E50"/>
+            </a:solidFill>
+            <a:prstDash val="solid"/>
+          </a:ln>
+        </p:spPr>
+      </p:sp>
+      <p:sp>
+        <p:nvSpPr>
+          <p:cNvPr id="3" name="Text 1"/>
+          <p:cNvSpPr/>
+          <p:nvPr/>
+        </p:nvSpPr>
+        <p:spPr>
+          <a:xfrm>
+            <a:off x="548640" y="201168"/>
+            <a:ext cx="9601200" cy="365760"/>
+          </a:xfrm>
+          <a:prstGeom prst="rect">
+            <a:avLst/>
+          </a:prstGeom>
+          <a:noFill/>
+          <a:ln/>
+        </p:spPr>
+        <p:txBody>
+          <a:bodyPr wrap="square" rtlCol="0" anchor="ctr"/>
+          <a:lstStyle/>
+          <a:p>
+            <a:pPr indent="0" marL="0">
+              <a:buNone/>
+            </a:pPr>
+            <a:r>
+              <a:rPr lang="en-US" sz="2000" b="1" dirty="0">
+                <a:solidFill>
+                  <a:srgbClr val="FFFFFF"/>
+                </a:solidFill>
+              </a:rPr>
+              <a:t>Tokenization and Stop Words</a:t>
+            </a:r>
+            <a:endParaRPr lang="en-US" sz="2000" dirty="0"/>
+          </a:p>
+        </p:txBody>
+      </p:sp>
+      <p:sp>
+        <p:nvSpPr>
+          <p:cNvPr id="4" name="Text 2"/>
+          <p:cNvSpPr/>
+          <p:nvPr/>
+        </p:nvSpPr>
+        <p:spPr>
+          <a:xfrm>
+            <a:off x="548640" y="914400"/>
+            <a:ext cx="10972800" cy="365760"/>
+          </a:xfrm>
+          <a:prstGeom prst="rect">
+            <a:avLst/>
+          </a:prstGeom>
+          <a:noFill/>
+          <a:ln/>
+        </p:spPr>
+        <p:txBody>
+          <a:bodyPr wrap="square" rtlCol="0" anchor="ctr"/>
+          <a:lstStyle/>
+          <a:p>
+            <a:pPr indent="0" marL="0">
+              <a:buNone/>
+            </a:pPr>
+            <a:r>
+              <a:rPr lang="en-US" sz="1300" dirty="0">
+                <a:solidFill>
+                  <a:srgbClr val="7F8C8D"/>
+                </a:solidFill>
+              </a:rPr>
+              <a:t>How text is split and filtered</a:t>
+            </a:r>
+            <a:endParaRPr lang="en-US" sz="1300" dirty="0"/>
+          </a:p>
+        </p:txBody>
+      </p:sp>
+      <p:sp>
+        <p:nvSpPr>
+          <p:cNvPr id="5" name="Text 3"/>
+          <p:cNvSpPr/>
+          <p:nvPr/>
+        </p:nvSpPr>
+        <p:spPr>
+          <a:xfrm>
+            <a:off x="822960" y="1463040"/>
+            <a:ext cx="4114800" cy="274320"/>
+          </a:xfrm>
+          <a:prstGeom prst="rect">
+            <a:avLst/>
+          </a:prstGeom>
+          <a:noFill/>
+          <a:ln/>
+        </p:spPr>
+        <p:txBody>
+          <a:bodyPr wrap="square" rtlCol="0" anchor="ctr"/>
+          <a:lstStyle/>
+          <a:p>
+            <a:pPr indent="0" marL="0">
+              <a:buNone/>
+            </a:pPr>
+            <a:r>
+              <a:rPr lang="en-US" sz="1500" b="1" dirty="0">
+                <a:solidFill>
+                  <a:srgbClr val="2C3E50"/>
+                </a:solidFill>
+              </a:rPr>
+              <a:t>Tokenization types:</a:t>
+            </a:r>
+            <a:endParaRPr lang="en-US" sz="1500" dirty="0"/>
+          </a:p>
+        </p:txBody>
+      </p:sp>
+      <p:sp>
+        <p:nvSpPr>
+          <p:cNvPr id="6" name="Text 4"/>
+          <p:cNvSpPr/>
+          <p:nvPr/>
+        </p:nvSpPr>
+        <p:spPr>
+          <a:xfrm>
+            <a:off x="914400" y="1828800"/>
+            <a:ext cx="5212080" cy="2377440"/>
+          </a:xfrm>
+          <a:prstGeom prst="rect">
+            <a:avLst/>
+          </a:prstGeom>
+          <a:noFill/>
+          <a:ln/>
+        </p:spPr>
+        <p:txBody>
+          <a:bodyPr wrap="square" rtlCol="0" anchor="ctr"/>
+          <a:lstStyle/>
+          <a:p>
+            <a:pPr marL="177800" indent="-177800">
+              <a:buSzPct val="100000"/>
+              <a:buChar char="•"/>
+            </a:pPr>
+            <a:r>
+              <a:rPr lang="en-US" sz="1300" dirty="0">
+                <a:solidFill>
+                  <a:srgbClr val="1C2833"/>
+                </a:solidFill>
+              </a:rPr>
+              <a:t>Word tokens: split by words and punctuation.</a:t>
+            </a:r>
+            <a:endParaRPr lang="en-US" sz="1300" dirty="0"/>
+          </a:p>
+          <a:p>
+            <a:pPr marL="177800" indent="-177800">
+              <a:buSzPct val="100000"/>
+              <a:buChar char="•"/>
+            </a:pPr>
+            <a:r>
+              <a:rPr lang="en-US" sz="1300" dirty="0">
+                <a:solidFill>
+                  <a:srgbClr val="1C2833"/>
+                </a:solidFill>
+              </a:rPr>
+              <a:t>Character tokens: every character as a token.</a:t>
+            </a:r>
+            <a:endParaRPr lang="en-US" sz="1300" dirty="0"/>
+          </a:p>
+          <a:p>
+            <a:pPr marL="177800" indent="-177800">
+              <a:buSzPct val="100000"/>
+              <a:buChar char="•"/>
+            </a:pPr>
+            <a:r>
+              <a:rPr lang="en-US" sz="1300" dirty="0">
+                <a:solidFill>
+                  <a:srgbClr val="1C2833"/>
+                </a:solidFill>
+              </a:rPr>
+              <a:t>Subword tokens: best for LLMs and unseen words.</a:t>
+            </a:r>
+            <a:endParaRPr lang="en-US" sz="1300" dirty="0"/>
+          </a:p>
+          <a:p>
+            <a:pPr marL="177800" indent="-177800">
+              <a:buSzPct val="100000"/>
+              <a:buChar char="•"/>
+            </a:pPr>
+            <a:r>
+              <a:rPr lang="en-US" sz="1300" dirty="0">
+                <a:solidFill>
+                  <a:srgbClr val="1C2833"/>
+                </a:solidFill>
+              </a:rPr>
+              <a:t>Sentence tokens: split by sentence boundaries.</a:t>
+            </a:r>
+            <a:endParaRPr lang="en-US" sz="1300" dirty="0"/>
+          </a:p>
+        </p:txBody>
+      </p:sp>
+      <p:sp>
+        <p:nvSpPr>
+          <p:cNvPr id="7" name="Shape 5"/>
+          <p:cNvSpPr/>
+          <p:nvPr/>
+        </p:nvSpPr>
+        <p:spPr>
+          <a:xfrm>
+            <a:off x="6217920" y="1463040"/>
+            <a:ext cx="5120640" cy="2834640"/>
+          </a:xfrm>
+          <a:prstGeom prst="roundRect">
+            <a:avLst/>
+          </a:prstGeom>
+          <a:solidFill>
+            <a:srgbClr val="FFFFFF"/>
+          </a:solidFill>
+          <a:ln w="12700">
+            <a:solidFill>
+              <a:srgbClr val="BDC3C7"/>
+            </a:solidFill>
+            <a:prstDash val="solid"/>
+          </a:ln>
+        </p:spPr>
+      </p:sp>
+      <p:sp>
+        <p:nvSpPr>
+          <p:cNvPr id="8" name="Text 6"/>
+          <p:cNvSpPr/>
+          <p:nvPr/>
+        </p:nvSpPr>
+        <p:spPr>
+          <a:xfrm>
+            <a:off x="6492240" y="1737360"/>
+            <a:ext cx="1645920" cy="274320"/>
+          </a:xfrm>
+          <a:prstGeom prst="rect">
+            <a:avLst/>
+          </a:prstGeom>
+          <a:noFill/>
+          <a:ln/>
+        </p:spPr>
+        <p:txBody>
+          <a:bodyPr wrap="square" rtlCol="0" anchor="ctr"/>
+          <a:lstStyle/>
+          <a:p>
+            <a:pPr indent="0" marL="0">
+              <a:buNone/>
+            </a:pPr>
+            <a:r>
+              <a:rPr lang="en-US" sz="1400" b="1" dirty="0">
+                <a:solidFill>
+                  <a:srgbClr val="5234B7"/>
+                </a:solidFill>
+              </a:rPr>
+              <a:t>Example</a:t>
+            </a:r>
+            <a:endParaRPr lang="en-US" sz="1400" dirty="0"/>
+          </a:p>
+        </p:txBody>
+      </p:sp>
+      <p:sp>
+        <p:nvSpPr>
+          <p:cNvPr id="9" name="Text 7"/>
+          <p:cNvSpPr/>
+          <p:nvPr/>
+        </p:nvSpPr>
+        <p:spPr>
+          <a:xfrm>
+            <a:off x="6492240" y="2103120"/>
+            <a:ext cx="4572000" cy="1737360"/>
+          </a:xfrm>
+          <a:prstGeom prst="rect">
+            <a:avLst/>
+          </a:prstGeom>
+          <a:noFill/>
+          <a:ln/>
+        </p:spPr>
+        <p:txBody>
+          <a:bodyPr wrap="square" rtlCol="0" anchor="ctr"/>
+          <a:lstStyle/>
+          <a:p>
+            <a:pPr indent="0" marL="0">
+              <a:buNone/>
+            </a:pPr>
+            <a:r>
+              <a:rPr lang="en-US" sz="1300" dirty="0">
+                <a:solidFill>
+                  <a:srgbClr val="1C2833"/>
+                </a:solidFill>
+              </a:rPr>
+              <a:t>Sentence: "This is the book that talks about artificial intelligence"</a:t>
+            </a:r>
+            <a:endParaRPr lang="en-US" sz="1300" dirty="0"/>
+          </a:p>
+          <a:p>
+            <a:pPr indent="0" marL="0">
+              <a:buNone/>
+            </a:pPr>
+            <a:r>
+              <a:rPr lang="en-US" sz="1300" dirty="0">
+                <a:solidFill>
+                  <a:srgbClr val="1C2833"/>
+                </a:solidFill>
+              </a:rPr>
+              <a:t>After stop-word reduction: "book talks artificial intelligence"</a:t>
+            </a:r>
+            <a:endParaRPr lang="en-US" sz="1300" dirty="0"/>
+          </a:p>
+        </p:txBody>
+      </p:sp>
+      <p:sp>
+        <p:nvSpPr>
+          <p:cNvPr id="10" name="Text 8"/>
+          <p:cNvSpPr/>
+          <p:nvPr/>
+        </p:nvSpPr>
+        <p:spPr>
+          <a:xfrm>
+            <a:off x="914400" y="4846320"/>
+            <a:ext cx="10607040" cy="822960"/>
+          </a:xfrm>
+          <a:prstGeom prst="rect">
+            <a:avLst/>
+          </a:prstGeom>
+          <a:noFill/>
+          <a:ln/>
+        </p:spPr>
+        <p:txBody>
+          <a:bodyPr wrap="square" rtlCol="0" anchor="ctr"/>
+          <a:lstStyle/>
+          <a:p>
+            <a:pPr indent="0" marL="0">
+              <a:buNone/>
+            </a:pPr>
+            <a:r>
+              <a:rPr lang="en-US" sz="1400" i="1" dirty="0">
+                <a:solidFill>
+                  <a:srgbClr val="E67E22"/>
+                </a:solidFill>
+              </a:rPr>
+              <a:t>Important: Do not remove stop words in tasks where meaning of words like "not" is critical.</a:t>
+            </a:r>
+            <a:endParaRPr lang="en-US" sz="1400" dirty="0"/>
+          </a:p>
+        </p:txBody>
+      </p:sp>
+      <p:sp>
+        <p:nvSpPr>
+          <p:cNvPr id="11" name="Text 9"/>
+          <p:cNvSpPr/>
+          <p:nvPr/>
+        </p:nvSpPr>
+        <p:spPr>
+          <a:xfrm>
+            <a:off x="548640" y="6537960"/>
+            <a:ext cx="10972800" cy="274320"/>
+          </a:xfrm>
+          <a:prstGeom prst="rect">
+            <a:avLst/>
+          </a:prstGeom>
+          <a:noFill/>
+          <a:ln/>
+        </p:spPr>
+        <p:txBody>
+          <a:bodyPr wrap="square" rtlCol="0" anchor="ctr"/>
+          <a:lstStyle/>
+          <a:p>
+            <a:pPr algn="r" indent="0" marL="0">
+              <a:buNone/>
+            </a:pPr>
+            <a:r>
+              <a:rPr lang="en-US" sz="1000" dirty="0">
+                <a:solidFill>
+                  <a:srgbClr val="9CA3AF"/>
+                </a:solidFill>
+              </a:rPr>
+              <a:t>NLP Day 1 | 5</a:t>
+            </a:r>
+            <a:endParaRPr lang="en-US" sz="1000" dirty="0"/>
+          </a:p>
+        </p:txBody>
+      </p:sp>
+    </p:spTree>
+  </p:cSld>
+  <p:clrMapOvr>
+    <a:masterClrMapping/>
+  </p:clrMapOvr>
+</p:sld>
+</file>
+
+<file path=ppt/slides/slide6.xml><?xml version="1.0" encoding="utf-8"?>
+<p:sld xmlns:a="http://schemas.openxmlformats.org/drawingml/2006/main" xmlns:r="http://schemas.openxmlformats.org/officeDocument/2006/relationships" xmlns:p="http://schemas.openxmlformats.org/presentationml/2006/main">
+  <p:cSld name="Slide 6">
+    <p:bg>
+      <p:bgPr>
+        <a:solidFill>
+          <a:srgbClr val="F3EEFF"/>
+        </a:solidFill>
+      </p:bgPr>
+    </p:bg>
+    <p:spTree>
+      <p:nvGrpSpPr>
+        <p:cNvPr id="1" name=""/>
+        <p:cNvGrpSpPr/>
+        <p:nvPr/>
+      </p:nvGrpSpPr>
+      <p:grpSpPr>
+        <a:xfrm>
+          <a:off x="0" y="0"/>
+          <a:ext cx="0" cy="0"/>
+          <a:chOff x="0" y="0"/>
+          <a:chExt cx="0" cy="0"/>
+        </a:xfrm>
+      </p:grpSpPr>
+      <p:sp>
+        <p:nvSpPr>
+          <p:cNvPr id="2" name="Shape 0"/>
+          <p:cNvSpPr/>
+          <p:nvPr/>
+        </p:nvSpPr>
+        <p:spPr>
+          <a:xfrm>
+            <a:off x="0" y="0"/>
+            <a:ext cx="12188952" cy="822960"/>
+          </a:xfrm>
+          <a:prstGeom prst="rect">
+            <a:avLst/>
+          </a:prstGeom>
+          <a:solidFill>
+            <a:srgbClr val="2C3E50"/>
+          </a:solidFill>
+          <a:ln w="12700">
+            <a:solidFill>
+              <a:srgbClr val="2C3E50"/>
+            </a:solidFill>
+            <a:prstDash val="solid"/>
+          </a:ln>
+        </p:spPr>
+      </p:sp>
+      <p:sp>
+        <p:nvSpPr>
+          <p:cNvPr id="3" name="Text 1"/>
+          <p:cNvSpPr/>
+          <p:nvPr/>
+        </p:nvSpPr>
+        <p:spPr>
+          <a:xfrm>
+            <a:off x="548640" y="201168"/>
+            <a:ext cx="9601200" cy="365760"/>
+          </a:xfrm>
+          <a:prstGeom prst="rect">
+            <a:avLst/>
+          </a:prstGeom>
+          <a:noFill/>
+          <a:ln/>
+        </p:spPr>
+        <p:txBody>
+          <a:bodyPr wrap="square" rtlCol="0" anchor="ctr"/>
+          <a:lstStyle/>
+          <a:p>
+            <a:pPr indent="0" marL="0">
+              <a:buNone/>
+            </a:pPr>
+            <a:r>
+              <a:rPr lang="en-US" sz="2000" b="1" dirty="0">
+                <a:solidFill>
+                  <a:srgbClr val="FFFFFF"/>
+                </a:solidFill>
+              </a:rPr>
+              <a:t>Stemming vs Lemmatization</a:t>
+            </a:r>
+            <a:endParaRPr lang="en-US" sz="2000" dirty="0"/>
+          </a:p>
+        </p:txBody>
+      </p:sp>
+      <p:sp>
+        <p:nvSpPr>
+          <p:cNvPr id="4" name="Text 2"/>
+          <p:cNvSpPr/>
+          <p:nvPr/>
+        </p:nvSpPr>
+        <p:spPr>
+          <a:xfrm>
+            <a:off x="548640" y="914400"/>
+            <a:ext cx="10972800" cy="365760"/>
+          </a:xfrm>
+          <a:prstGeom prst="rect">
+            <a:avLst/>
+          </a:prstGeom>
+          <a:noFill/>
+          <a:ln/>
+        </p:spPr>
+        <p:txBody>
+          <a:bodyPr wrap="square" rtlCol="0" anchor="ctr"/>
+          <a:lstStyle/>
+          <a:p>
+            <a:pPr indent="0" marL="0">
+              <a:buNone/>
+            </a:pPr>
+            <a:r>
+              <a:rPr lang="en-US" sz="1300" dirty="0">
+                <a:solidFill>
+                  <a:srgbClr val="7F8C8D"/>
+                </a:solidFill>
+              </a:rPr>
+              <a:t>Speed versus linguistic accuracy</a:t>
+            </a:r>
+            <a:endParaRPr lang="en-US" sz="1300" dirty="0"/>
+          </a:p>
+        </p:txBody>
+      </p:sp>
+      <p:sp>
+        <p:nvSpPr>
+          <p:cNvPr id="5" name="Shape 3"/>
+          <p:cNvSpPr/>
+          <p:nvPr/>
+        </p:nvSpPr>
+        <p:spPr>
+          <a:xfrm>
+            <a:off x="822960" y="1463040"/>
+            <a:ext cx="5303520" cy="3474720"/>
+          </a:xfrm>
+          <a:prstGeom prst="roundRect">
+            <a:avLst/>
+          </a:prstGeom>
+          <a:solidFill>
+            <a:srgbClr val="FFFFFF"/>
+          </a:solidFill>
+          <a:ln w="12700">
+            <a:solidFill>
+              <a:srgbClr val="BDC3C7"/>
+            </a:solidFill>
+            <a:prstDash val="solid"/>
+          </a:ln>
+        </p:spPr>
+      </p:sp>
+      <p:sp>
+        <p:nvSpPr>
+          <p:cNvPr id="6" name="Shape 4"/>
+          <p:cNvSpPr/>
+          <p:nvPr/>
+        </p:nvSpPr>
+        <p:spPr>
+          <a:xfrm>
+            <a:off x="6126480" y="1463040"/>
+            <a:ext cx="5303520" cy="3474720"/>
+          </a:xfrm>
+          <a:prstGeom prst="roundRect">
+            <a:avLst/>
+          </a:prstGeom>
+          <a:solidFill>
+            <a:srgbClr val="FFFFFF"/>
+          </a:solidFill>
+          <a:ln w="12700">
+            <a:solidFill>
+              <a:srgbClr val="BDC3C7"/>
+            </a:solidFill>
+            <a:prstDash val="solid"/>
+          </a:ln>
+        </p:spPr>
+      </p:sp>
+      <p:sp>
+        <p:nvSpPr>
+          <p:cNvPr id="7" name="Text 5"/>
+          <p:cNvSpPr/>
+          <p:nvPr/>
+        </p:nvSpPr>
+        <p:spPr>
+          <a:xfrm>
+            <a:off x="1097280" y="1783080"/>
+            <a:ext cx="2011680" cy="274320"/>
+          </a:xfrm>
+          <a:prstGeom prst="rect">
+            <a:avLst/>
+          </a:prstGeom>
+          <a:noFill/>
+          <a:ln/>
+        </p:spPr>
+        <p:txBody>
+          <a:bodyPr wrap="square" rtlCol="0" anchor="ctr"/>
+          <a:lstStyle/>
+          <a:p>
+            <a:pPr indent="0" marL="0">
+              <a:buNone/>
+            </a:pPr>
+            <a:r>
+              <a:rPr lang="en-US" sz="1600" b="1" dirty="0">
+                <a:solidFill>
+                  <a:srgbClr val="2C3E50"/>
+                </a:solidFill>
+              </a:rPr>
+              <a:t>Stemming</a:t>
+            </a:r>
+            <a:endParaRPr lang="en-US" sz="1600" dirty="0"/>
+          </a:p>
+        </p:txBody>
+      </p:sp>
+      <p:sp>
+        <p:nvSpPr>
+          <p:cNvPr id="8" name="Text 6"/>
+          <p:cNvSpPr/>
+          <p:nvPr/>
+        </p:nvSpPr>
+        <p:spPr>
+          <a:xfrm>
+            <a:off x="1097280" y="2148840"/>
+            <a:ext cx="4572000" cy="2377440"/>
+          </a:xfrm>
+          <a:prstGeom prst="rect">
+            <a:avLst/>
+          </a:prstGeom>
+          <a:noFill/>
+          <a:ln/>
+        </p:spPr>
+        <p:txBody>
+          <a:bodyPr wrap="square" rtlCol="0" anchor="ctr"/>
+          <a:lstStyle/>
+          <a:p>
+            <a:pPr marL="177800" indent="-177800">
+              <a:buSzPct val="100000"/>
+              <a:buChar char="•"/>
+            </a:pPr>
+            <a:r>
+              <a:rPr lang="en-US" sz="1300" dirty="0">
+                <a:solidFill>
+                  <a:srgbClr val="1C2833"/>
+                </a:solidFill>
+              </a:rPr>
+              <a:t>Rule-based truncation.</a:t>
+            </a:r>
+            <a:endParaRPr lang="en-US" sz="1300" dirty="0"/>
+          </a:p>
+          <a:p>
+            <a:pPr marL="177800" indent="-177800">
+              <a:buSzPct val="100000"/>
+              <a:buChar char="•"/>
+            </a:pPr>
+            <a:r>
+              <a:rPr lang="en-US" sz="1300" dirty="0">
+                <a:solidFill>
+                  <a:srgbClr val="1C2833"/>
+                </a:solidFill>
+              </a:rPr>
+              <a:t>Very fast.</a:t>
+            </a:r>
+            <a:endParaRPr lang="en-US" sz="1300" dirty="0"/>
+          </a:p>
+          <a:p>
+            <a:pPr marL="177800" indent="-177800">
+              <a:buSzPct val="100000"/>
+              <a:buChar char="•"/>
+            </a:pPr>
+            <a:r>
+              <a:rPr lang="en-US" sz="1300" dirty="0">
+                <a:solidFill>
+                  <a:srgbClr val="1C2833"/>
+                </a:solidFill>
+              </a:rPr>
+              <a:t>May output non-real words.</a:t>
+            </a:r>
+            <a:endParaRPr lang="en-US" sz="1300" dirty="0"/>
+          </a:p>
+          <a:p>
+            <a:pPr marL="177800" indent="-177800">
+              <a:buSzPct val="100000"/>
+              <a:buChar char="•"/>
+            </a:pPr>
+            <a:r>
+              <a:rPr lang="en-US" sz="1300" dirty="0">
+                <a:solidFill>
+                  <a:srgbClr val="1C2833"/>
+                </a:solidFill>
+              </a:rPr>
+              <a:t>Best for large-scale indexing.</a:t>
+            </a:r>
+            <a:endParaRPr lang="en-US" sz="1300" dirty="0"/>
+          </a:p>
+        </p:txBody>
+      </p:sp>
+      <p:sp>
+        <p:nvSpPr>
+          <p:cNvPr id="9" name="Text 7"/>
+          <p:cNvSpPr/>
+          <p:nvPr/>
+        </p:nvSpPr>
+        <p:spPr>
+          <a:xfrm>
+            <a:off x="6400800" y="1783080"/>
+            <a:ext cx="2926080" cy="274320"/>
+          </a:xfrm>
+          <a:prstGeom prst="rect">
+            <a:avLst/>
+          </a:prstGeom>
+          <a:noFill/>
+          <a:ln/>
+        </p:spPr>
+        <p:txBody>
+          <a:bodyPr wrap="square" rtlCol="0" anchor="ctr"/>
+          <a:lstStyle/>
+          <a:p>
+            <a:pPr indent="0" marL="0">
+              <a:buNone/>
+            </a:pPr>
+            <a:r>
+              <a:rPr lang="en-US" sz="1600" b="1" dirty="0">
+                <a:solidFill>
+                  <a:srgbClr val="5234B7"/>
+                </a:solidFill>
+              </a:rPr>
+              <a:t>Lemmatization</a:t>
+            </a:r>
+            <a:endParaRPr lang="en-US" sz="1600" dirty="0"/>
+          </a:p>
+        </p:txBody>
+      </p:sp>
+      <p:sp>
+        <p:nvSpPr>
+          <p:cNvPr id="10" name="Text 8"/>
+          <p:cNvSpPr/>
+          <p:nvPr/>
+        </p:nvSpPr>
+        <p:spPr>
+          <a:xfrm>
+            <a:off x="6400800" y="2148840"/>
+            <a:ext cx="4572000" cy="2377440"/>
+          </a:xfrm>
+          <a:prstGeom prst="rect">
+            <a:avLst/>
+          </a:prstGeom>
+          <a:noFill/>
+          <a:ln/>
+        </p:spPr>
+        <p:txBody>
+          <a:bodyPr wrap="square" rtlCol="0" anchor="ctr"/>
+          <a:lstStyle/>
+          <a:p>
+            <a:pPr marL="177800" indent="-177800">
+              <a:buSzPct val="100000"/>
+              <a:buChar char="•"/>
+            </a:pPr>
+            <a:r>
+              <a:rPr lang="en-US" sz="1300" dirty="0">
+                <a:solidFill>
+                  <a:srgbClr val="1C2833"/>
+                </a:solidFill>
+              </a:rPr>
+              <a:t>Dictionary and grammar aware.</a:t>
+            </a:r>
+            <a:endParaRPr lang="en-US" sz="1300" dirty="0"/>
+          </a:p>
+          <a:p>
+            <a:pPr marL="177800" indent="-177800">
+              <a:buSzPct val="100000"/>
+              <a:buChar char="•"/>
+            </a:pPr>
+            <a:r>
+              <a:rPr lang="en-US" sz="1300" dirty="0">
+                <a:solidFill>
+                  <a:srgbClr val="1C2833"/>
+                </a:solidFill>
+              </a:rPr>
+              <a:t>More accurate, slightly slower.</a:t>
+            </a:r>
+            <a:endParaRPr lang="en-US" sz="1300" dirty="0"/>
+          </a:p>
+          <a:p>
+            <a:pPr marL="177800" indent="-177800">
+              <a:buSzPct val="100000"/>
+              <a:buChar char="•"/>
+            </a:pPr>
+            <a:r>
+              <a:rPr lang="en-US" sz="1300" dirty="0">
+                <a:solidFill>
+                  <a:srgbClr val="1C2833"/>
+                </a:solidFill>
+              </a:rPr>
+              <a:t>Outputs valid base forms.</a:t>
+            </a:r>
+            <a:endParaRPr lang="en-US" sz="1300" dirty="0"/>
+          </a:p>
+          <a:p>
+            <a:pPr marL="177800" indent="-177800">
+              <a:buSzPct val="100000"/>
+              <a:buChar char="•"/>
+            </a:pPr>
+            <a:r>
+              <a:rPr lang="en-US" sz="1300" dirty="0">
+                <a:solidFill>
+                  <a:srgbClr val="1C2833"/>
+                </a:solidFill>
+              </a:rPr>
+              <a:t>Best for chatbots and QA tasks.</a:t>
+            </a:r>
+            <a:endParaRPr lang="en-US" sz="1300" dirty="0"/>
+          </a:p>
+        </p:txBody>
+      </p:sp>
+      <p:sp>
+        <p:nvSpPr>
+          <p:cNvPr id="11" name="Text 9"/>
+          <p:cNvSpPr/>
+          <p:nvPr/>
+        </p:nvSpPr>
+        <p:spPr>
+          <a:xfrm>
+            <a:off x="914400" y="5303520"/>
+            <a:ext cx="10607040" cy="457200"/>
+          </a:xfrm>
+          <a:prstGeom prst="rect">
+            <a:avLst/>
+          </a:prstGeom>
+          <a:noFill/>
+          <a:ln/>
+        </p:spPr>
+        <p:txBody>
+          <a:bodyPr wrap="square" rtlCol="0" anchor="ctr"/>
+          <a:lstStyle/>
+          <a:p>
+            <a:pPr indent="0" marL="0">
+              <a:buNone/>
+            </a:pPr>
+            <a:r>
+              <a:rPr lang="en-US" sz="1400" i="1" dirty="0">
+                <a:solidFill>
+                  <a:srgbClr val="E67E22"/>
+                </a:solidFill>
+              </a:rPr>
+              <a:t>Examples: studies -&gt; study, mice -&gt; mouse, better -&gt; good</a:t>
+            </a:r>
+            <a:endParaRPr lang="en-US" sz="1400" dirty="0"/>
+          </a:p>
+        </p:txBody>
+      </p:sp>
+      <p:sp>
+        <p:nvSpPr>
+          <p:cNvPr id="12" name="Text 10"/>
+          <p:cNvSpPr/>
+          <p:nvPr/>
+        </p:nvSpPr>
+        <p:spPr>
+          <a:xfrm>
+            <a:off x="548640" y="6537960"/>
+            <a:ext cx="10972800" cy="274320"/>
+          </a:xfrm>
+          <a:prstGeom prst="rect">
+            <a:avLst/>
+          </a:prstGeom>
+          <a:noFill/>
+          <a:ln/>
+        </p:spPr>
+        <p:txBody>
+          <a:bodyPr wrap="square" rtlCol="0" anchor="ctr"/>
+          <a:lstStyle/>
+          <a:p>
+            <a:pPr algn="r" indent="0" marL="0">
+              <a:buNone/>
+            </a:pPr>
+            <a:r>
+              <a:rPr lang="en-US" sz="1000" dirty="0">
+                <a:solidFill>
+                  <a:srgbClr val="9CA3AF"/>
+                </a:solidFill>
+              </a:rPr>
+              <a:t>NLP Day 1 | 6</a:t>
+            </a:r>
+            <a:endParaRPr lang="en-US" sz="1000" dirty="0"/>
+          </a:p>
+        </p:txBody>
+      </p:sp>
+    </p:spTree>
+  </p:cSld>
+  <p:clrMapOvr>
+    <a:masterClrMapping/>
+  </p:clrMapOvr>
+</p:sld>
+</file>
+
+<file path=ppt/slides/slide7.xml><?xml version="1.0" encoding="utf-8"?>
+<p:sld xmlns:a="http://schemas.openxmlformats.org/drawingml/2006/main" xmlns:r="http://schemas.openxmlformats.org/officeDocument/2006/relationships" xmlns:p="http://schemas.openxmlformats.org/presentationml/2006/main">
+  <p:cSld name="Slide 7">
+    <p:bg>
+      <p:bgPr>
+        <a:solidFill>
+          <a:srgbClr val="F3EEFF"/>
+        </a:solidFill>
+      </p:bgPr>
+    </p:bg>
+    <p:spTree>
+      <p:nvGrpSpPr>
+        <p:cNvPr id="1" name=""/>
+        <p:cNvGrpSpPr/>
+        <p:nvPr/>
+      </p:nvGrpSpPr>
+      <p:grpSpPr>
+        <a:xfrm>
+          <a:off x="0" y="0"/>
+          <a:ext cx="0" cy="0"/>
+          <a:chOff x="0" y="0"/>
+          <a:chExt cx="0" cy="0"/>
+        </a:xfrm>
+      </p:grpSpPr>
+      <p:sp>
+        <p:nvSpPr>
+          <p:cNvPr id="2" name="Shape 0"/>
+          <p:cNvSpPr/>
+          <p:nvPr/>
+        </p:nvSpPr>
+        <p:spPr>
+          <a:xfrm>
+            <a:off x="0" y="0"/>
+            <a:ext cx="12188952" cy="822960"/>
+          </a:xfrm>
+          <a:prstGeom prst="rect">
+            <a:avLst/>
+          </a:prstGeom>
+          <a:solidFill>
+            <a:srgbClr val="2C3E50"/>
+          </a:solidFill>
+          <a:ln w="12700">
+            <a:solidFill>
+              <a:srgbClr val="2C3E50"/>
+            </a:solidFill>
+            <a:prstDash val="solid"/>
+          </a:ln>
+        </p:spPr>
+      </p:sp>
+      <p:sp>
+        <p:nvSpPr>
+          <p:cNvPr id="3" name="Text 1"/>
+          <p:cNvSpPr/>
+          <p:nvPr/>
+        </p:nvSpPr>
+        <p:spPr>
+          <a:xfrm>
+            <a:off x="548640" y="201168"/>
+            <a:ext cx="9601200" cy="365760"/>
+          </a:xfrm>
+          <a:prstGeom prst="rect">
+            <a:avLst/>
+          </a:prstGeom>
+          <a:noFill/>
+          <a:ln/>
+        </p:spPr>
+        <p:txBody>
+          <a:bodyPr wrap="square" rtlCol="0" anchor="ctr"/>
+          <a:lstStyle/>
+          <a:p>
+            <a:pPr indent="0" marL="0">
+              <a:buNone/>
+            </a:pPr>
+            <a:r>
+              <a:rPr lang="en-US" sz="2000" b="1" dirty="0">
+                <a:solidFill>
+                  <a:srgbClr val="FFFFFF"/>
+                </a:solidFill>
+              </a:rPr>
+              <a:t>POS Tagging and Named Entity Recognition</a:t>
+            </a:r>
+            <a:endParaRPr lang="en-US" sz="2000" dirty="0"/>
+          </a:p>
+        </p:txBody>
+      </p:sp>
+      <p:sp>
+        <p:nvSpPr>
+          <p:cNvPr id="4" name="Text 2"/>
+          <p:cNvSpPr/>
+          <p:nvPr/>
+        </p:nvSpPr>
+        <p:spPr>
+          <a:xfrm>
+            <a:off x="548640" y="914400"/>
+            <a:ext cx="10972800" cy="365760"/>
+          </a:xfrm>
+          <a:prstGeom prst="rect">
+            <a:avLst/>
+          </a:prstGeom>
+          <a:noFill/>
+          <a:ln/>
+        </p:spPr>
+        <p:txBody>
+          <a:bodyPr wrap="square" rtlCol="0" anchor="ctr"/>
+          <a:lstStyle/>
+          <a:p>
+            <a:pPr indent="0" marL="0">
+              <a:buNone/>
+            </a:pPr>
+            <a:r>
+              <a:rPr lang="en-US" sz="1300" dirty="0">
+                <a:solidFill>
+                  <a:srgbClr val="7F8C8D"/>
+                </a:solidFill>
+              </a:rPr>
+              <a:t>Understanding grammar and extracting facts</a:t>
+            </a:r>
+            <a:endParaRPr lang="en-US" sz="1300" dirty="0"/>
+          </a:p>
+        </p:txBody>
+      </p:sp>
+      <p:sp>
+        <p:nvSpPr>
+          <p:cNvPr id="5" name="Text 3"/>
+          <p:cNvSpPr/>
+          <p:nvPr/>
+        </p:nvSpPr>
+        <p:spPr>
+          <a:xfrm>
+            <a:off x="822960" y="1554480"/>
+            <a:ext cx="10789920" cy="411480"/>
+          </a:xfrm>
+          <a:prstGeom prst="rect">
+            <a:avLst/>
+          </a:prstGeom>
+          <a:noFill/>
+          <a:ln/>
+        </p:spPr>
+        <p:txBody>
+          <a:bodyPr wrap="square" rtlCol="0" anchor="ctr"/>
+          <a:lstStyle/>
+          <a:p>
+            <a:pPr indent="0" marL="0">
+              <a:buNone/>
+            </a:pPr>
+            <a:r>
+              <a:rPr lang="en-US" sz="1400" dirty="0">
+                <a:solidFill>
+                  <a:srgbClr val="1C2833"/>
+                </a:solidFill>
+              </a:rPr>
+              <a:t>POS Tagging labels each word by grammatical role (NOUN, VERB, ADJ, etc.).</a:t>
+            </a:r>
+            <a:endParaRPr lang="en-US" sz="1400" dirty="0"/>
+          </a:p>
+        </p:txBody>
+      </p:sp>
+      <p:sp>
+        <p:nvSpPr>
+          <p:cNvPr id="6" name="Text 4"/>
+          <p:cNvSpPr/>
+          <p:nvPr/>
+        </p:nvSpPr>
+        <p:spPr>
+          <a:xfrm>
+            <a:off x="822960" y="2011680"/>
+            <a:ext cx="10789920" cy="411480"/>
+          </a:xfrm>
+          <a:prstGeom prst="rect">
+            <a:avLst/>
+          </a:prstGeom>
+          <a:noFill/>
+          <a:ln/>
+        </p:spPr>
+        <p:txBody>
+          <a:bodyPr wrap="square" rtlCol="0" anchor="ctr"/>
+          <a:lstStyle/>
+          <a:p>
+            <a:pPr indent="0" marL="0">
+              <a:buNone/>
+            </a:pPr>
+            <a:r>
+              <a:rPr lang="en-US" sz="1400" dirty="0">
+                <a:solidFill>
+                  <a:srgbClr val="1C2833"/>
+                </a:solidFill>
+              </a:rPr>
+              <a:t>NER identifies entities like PERSON, ORG, DATE, MONEY, and LOCATION.</a:t>
+            </a:r>
+            <a:endParaRPr lang="en-US" sz="1400" dirty="0"/>
+          </a:p>
+        </p:txBody>
+      </p:sp>
+      <p:sp>
+        <p:nvSpPr>
+          <p:cNvPr id="7" name="Shape 5"/>
+          <p:cNvSpPr/>
+          <p:nvPr/>
+        </p:nvSpPr>
+        <p:spPr>
+          <a:xfrm>
+            <a:off x="822960" y="2651760"/>
+            <a:ext cx="10789920" cy="2468880"/>
+          </a:xfrm>
+          <a:prstGeom prst="roundRect">
+            <a:avLst/>
+          </a:prstGeom>
+          <a:solidFill>
+            <a:srgbClr val="FFFFFF"/>
+          </a:solidFill>
+          <a:ln w="12700">
+            <a:solidFill>
+              <a:srgbClr val="BDC3C7"/>
+            </a:solidFill>
+            <a:prstDash val="solid"/>
+          </a:ln>
+        </p:spPr>
+      </p:sp>
+      <p:sp>
+        <p:nvSpPr>
+          <p:cNvPr id="8" name="Text 6"/>
+          <p:cNvSpPr/>
+          <p:nvPr/>
+        </p:nvSpPr>
+        <p:spPr>
+          <a:xfrm>
+            <a:off x="1097280" y="2926080"/>
+            <a:ext cx="10149840" cy="2011680"/>
+          </a:xfrm>
+          <a:prstGeom prst="rect">
+            <a:avLst/>
+          </a:prstGeom>
+          <a:noFill/>
+          <a:ln/>
+        </p:spPr>
+        <p:txBody>
+          <a:bodyPr wrap="square" rtlCol="0" anchor="ctr"/>
+          <a:lstStyle/>
+          <a:p>
+            <a:pPr indent="0" marL="0">
+              <a:buNone/>
+            </a:pPr>
+            <a:r>
+              <a:rPr lang="en-US" sz="1300" dirty="0">
+                <a:solidFill>
+                  <a:srgbClr val="5234B7"/>
+                </a:solidFill>
+              </a:rPr>
+              <a:t>Example sentence: "Apple CEO Tim Cook announced a $430 billion investment in the United States."</a:t>
+            </a:r>
+            <a:endParaRPr lang="en-US" sz="1300" dirty="0"/>
+          </a:p>
+          <a:p>
+            <a:pPr indent="0" marL="0">
+              <a:buNone/>
+            </a:pPr>
+            <a:endParaRPr lang="en-US" sz="1300" dirty="0"/>
+          </a:p>
+          <a:p>
+            <a:pPr indent="0" marL="0">
+              <a:buNone/>
+            </a:pPr>
+            <a:r>
+              <a:rPr lang="en-US" sz="1300" dirty="0">
+                <a:solidFill>
+                  <a:srgbClr val="5234B7"/>
+                </a:solidFill>
+              </a:rPr>
+              <a:t>Possible extracted entities:</a:t>
+            </a:r>
+            <a:endParaRPr lang="en-US" sz="1300" dirty="0"/>
+          </a:p>
+          <a:p>
+            <a:pPr indent="0" marL="0">
+              <a:buNone/>
+            </a:pPr>
+            <a:r>
+              <a:rPr lang="en-US" sz="1300" dirty="0">
+                <a:solidFill>
+                  <a:srgbClr val="5234B7"/>
+                </a:solidFill>
+              </a:rPr>
+              <a:t>- ORG: Apple</a:t>
+            </a:r>
+            <a:endParaRPr lang="en-US" sz="1300" dirty="0"/>
+          </a:p>
+          <a:p>
+            <a:pPr indent="0" marL="0">
+              <a:buNone/>
+            </a:pPr>
+            <a:r>
+              <a:rPr lang="en-US" sz="1300" dirty="0">
+                <a:solidFill>
+                  <a:srgbClr val="5234B7"/>
+                </a:solidFill>
+              </a:rPr>
+              <a:t>- PERSON: Tim Cook</a:t>
+            </a:r>
+            <a:endParaRPr lang="en-US" sz="1300" dirty="0"/>
+          </a:p>
+          <a:p>
+            <a:pPr indent="0" marL="0">
+              <a:buNone/>
+            </a:pPr>
+            <a:r>
+              <a:rPr lang="en-US" sz="1300" dirty="0">
+                <a:solidFill>
+                  <a:srgbClr val="5234B7"/>
+                </a:solidFill>
+              </a:rPr>
+              <a:t>- MONEY: $430 billion</a:t>
+            </a:r>
+            <a:endParaRPr lang="en-US" sz="1300" dirty="0"/>
+          </a:p>
+          <a:p>
+            <a:pPr indent="0" marL="0">
+              <a:buNone/>
+            </a:pPr>
+            <a:r>
+              <a:rPr lang="en-US" sz="1300" dirty="0">
+                <a:solidFill>
+                  <a:srgbClr val="5234B7"/>
+                </a:solidFill>
+              </a:rPr>
+              <a:t>- GPE: United States</a:t>
+            </a:r>
+            <a:endParaRPr lang="en-US" sz="1300" dirty="0"/>
+          </a:p>
+        </p:txBody>
+      </p:sp>
+      <p:sp>
+        <p:nvSpPr>
+          <p:cNvPr id="9" name="Text 7"/>
+          <p:cNvSpPr/>
+          <p:nvPr/>
+        </p:nvSpPr>
+        <p:spPr>
+          <a:xfrm>
+            <a:off x="548640" y="6537960"/>
+            <a:ext cx="10972800" cy="274320"/>
+          </a:xfrm>
+          <a:prstGeom prst="rect">
+            <a:avLst/>
+          </a:prstGeom>
+          <a:noFill/>
+          <a:ln/>
+        </p:spPr>
+        <p:txBody>
+          <a:bodyPr wrap="square" rtlCol="0" anchor="ctr"/>
+          <a:lstStyle/>
+          <a:p>
+            <a:pPr algn="r" indent="0" marL="0">
+              <a:buNone/>
+            </a:pPr>
+            <a:r>
+              <a:rPr lang="en-US" sz="1000" dirty="0">
+                <a:solidFill>
+                  <a:srgbClr val="9CA3AF"/>
+                </a:solidFill>
+              </a:rPr>
+              <a:t>NLP Day 1 | 7</a:t>
+            </a:r>
+            <a:endParaRPr lang="en-US" sz="1000" dirty="0"/>
+          </a:p>
+        </p:txBody>
+      </p:sp>
+    </p:spTree>
+  </p:cSld>
+  <p:clrMapOvr>
+    <a:masterClrMapping/>
+  </p:clrMapOvr>
+</p:sld>
+</file>
+
+<file path=ppt/slides/slide8.xml><?xml version="1.0" encoding="utf-8"?>
+<p:sld xmlns:a="http://schemas.openxmlformats.org/drawingml/2006/main" xmlns:r="http://schemas.openxmlformats.org/officeDocument/2006/relationships" xmlns:p="http://schemas.openxmlformats.org/presentationml/2006/main">
+  <p:cSld name="Slide 8">
+    <p:bg>
+      <p:bgPr>
+        <a:solidFill>
+          <a:srgbClr val="F3EEFF"/>
+        </a:solidFill>
+      </p:bgPr>
+    </p:bg>
+    <p:spTree>
+      <p:nvGrpSpPr>
+        <p:cNvPr id="1" name=""/>
+        <p:cNvGrpSpPr/>
+        <p:nvPr/>
+      </p:nvGrpSpPr>
+      <p:grpSpPr>
+        <a:xfrm>
+          <a:off x="0" y="0"/>
+          <a:ext cx="0" cy="0"/>
+          <a:chOff x="0" y="0"/>
+          <a:chExt cx="0" cy="0"/>
+        </a:xfrm>
+      </p:grpSpPr>
+      <p:sp>
+        <p:nvSpPr>
           <p:cNvPr id="2" name="Text 0"/>
           <p:cNvSpPr/>
           <p:nvPr/>
         </p:nvSpPr>
         <p:spPr>
           <a:xfrm>
-            <a:off x="731520" y="2011680"/>
-            <a:ext cx="10789920" cy="822960"/>
+            <a:off x="731520" y="1188720"/>
+            <a:ext cx="10789920" cy="731520"/>
           </a:xfrm>
           <a:prstGeom prst="rect">
             <a:avLst/>
@@ -3158,14 +4303,14 @@
               <a:buNone/>
             </a:pPr>
             <a:r>
-              <a:rPr lang="en-US" sz="4400" b="1" dirty="0">
+              <a:rPr lang="en-US" sz="3800" b="1" dirty="0">
                 <a:solidFill>
                   <a:srgbClr val="2C3E50"/>
                 </a:solidFill>
               </a:rPr>
-              <a:t>Thank You</a:t>
-            </a:r>
-            <a:endParaRPr lang="en-US" sz="4400" dirty="0"/>
+              <a:t>Day 1 Summary</a:t>
+            </a:r>
+            <a:endParaRPr lang="en-US" sz="3800" dirty="0"/>
           </a:p>
         </p:txBody>
       </p:sp>
@@ -3177,80 +4322,90 @@
         </p:nvSpPr>
         <p:spPr>
           <a:xfrm>
-            <a:off x="1097280" y="3017520"/>
-            <a:ext cx="10058400" cy="457200"/>
-          </a:xfrm>
-          <a:prstGeom prst="rect">
-            <a:avLst/>
-          </a:prstGeom>
-          <a:noFill/>
-          <a:ln/>
-        </p:spPr>
-        <p:txBody>
-          <a:bodyPr wrap="square" rtlCol="0" anchor="ctr"/>
-          <a:lstStyle/>
-          <a:p>
-            <a:pPr algn="ctr" indent="0" marL="0">
-              <a:buNone/>
-            </a:pPr>
-            <a:r>
-              <a:rPr lang="en-US" sz="1900" dirty="0">
+            <a:off x="1097280" y="2194560"/>
+            <a:ext cx="9966960" cy="2377440"/>
+          </a:xfrm>
+          <a:prstGeom prst="rect">
+            <a:avLst/>
+          </a:prstGeom>
+          <a:noFill/>
+          <a:ln/>
+        </p:spPr>
+        <p:txBody>
+          <a:bodyPr wrap="square" rtlCol="0" anchor="ctr"/>
+          <a:lstStyle/>
+          <a:p>
+            <a:pPr marL="177800" indent="-177800">
+              <a:buSzPct val="100000"/>
+              <a:buChar char="•"/>
+            </a:pPr>
+            <a:r>
+              <a:rPr lang="en-US" sz="1600" dirty="0">
                 <a:solidFill>
                   <a:srgbClr val="1C2833"/>
                 </a:solidFill>
               </a:rPr>
-              <a:t>We look forward to achieving great results together.</a:t>
-            </a:r>
-            <a:endParaRPr lang="en-US" sz="1900" dirty="0"/>
-          </a:p>
-        </p:txBody>
-      </p:sp>
-      <p:sp>
-        <p:nvSpPr>
-          <p:cNvPr id="4" name="Text 2"/>
-          <p:cNvSpPr/>
-          <p:nvPr/>
-        </p:nvSpPr>
-        <p:spPr>
-          <a:xfrm>
-            <a:off x="1097280" y="3840480"/>
-            <a:ext cx="10058400" cy="365760"/>
-          </a:xfrm>
-          <a:prstGeom prst="rect">
-            <a:avLst/>
-          </a:prstGeom>
-          <a:noFill/>
-          <a:ln/>
-        </p:spPr>
-        <p:txBody>
-          <a:bodyPr wrap="square" rtlCol="0" anchor="ctr"/>
-          <a:lstStyle/>
-          <a:p>
-            <a:pPr algn="ctr" indent="0" marL="0">
-              <a:buNone/>
-            </a:pPr>
-            <a:r>
-              <a:rPr lang="en-US" sz="1400" dirty="0">
-                <a:solidFill>
-                  <a:srgbClr val="7F8C8D"/>
-                </a:solidFill>
-              </a:rPr>
-              <a:t>Contact: office@example.com</a:t>
-            </a:r>
-            <a:endParaRPr lang="en-US" sz="1400" dirty="0"/>
-          </a:p>
-        </p:txBody>
-      </p:sp>
-      <p:sp>
-        <p:nvSpPr>
-          <p:cNvPr id="5" name="Shape 3"/>
-          <p:cNvSpPr/>
-          <p:nvPr/>
-        </p:nvSpPr>
-        <p:spPr>
-          <a:xfrm>
-            <a:off x="4663440" y="4389120"/>
-            <a:ext cx="2834640" cy="411480"/>
+              <a:t>NLP is about converting language into structured, machine-usable information.</a:t>
+            </a:r>
+            <a:endParaRPr lang="en-US" sz="1600" dirty="0"/>
+          </a:p>
+          <a:p>
+            <a:pPr marL="177800" indent="-177800">
+              <a:buSzPct val="100000"/>
+              <a:buChar char="•"/>
+            </a:pPr>
+            <a:r>
+              <a:rPr lang="en-US" sz="1600" dirty="0">
+                <a:solidFill>
+                  <a:srgbClr val="1C2833"/>
+                </a:solidFill>
+              </a:rPr>
+              <a:t>The pipeline starts with cleaning and ends with rich linguistic features.</a:t>
+            </a:r>
+            <a:endParaRPr lang="en-US" sz="1600" dirty="0"/>
+          </a:p>
+          <a:p>
+            <a:pPr marL="177800" indent="-177800">
+              <a:buSzPct val="100000"/>
+              <a:buChar char="•"/>
+            </a:pPr>
+            <a:r>
+              <a:rPr lang="en-US" sz="1600" dirty="0">
+                <a:solidFill>
+                  <a:srgbClr val="1C2833"/>
+                </a:solidFill>
+              </a:rPr>
+              <a:t>Tokenization, lemmatization, POS, and NER are foundational building blocks.</a:t>
+            </a:r>
+            <a:endParaRPr lang="en-US" sz="1600" dirty="0"/>
+          </a:p>
+          <a:p>
+            <a:pPr marL="177800" indent="-177800">
+              <a:buSzPct val="100000"/>
+              <a:buChar char="•"/>
+            </a:pPr>
+            <a:r>
+              <a:rPr lang="en-US" sz="1600" dirty="0">
+                <a:solidFill>
+                  <a:srgbClr val="1C2833"/>
+                </a:solidFill>
+              </a:rPr>
+              <a:t>Choosing the right preprocessing depends on the target task and quality needs.</a:t>
+            </a:r>
+            <a:endParaRPr lang="en-US" sz="1600" dirty="0"/>
+          </a:p>
+        </p:txBody>
+      </p:sp>
+      <p:sp>
+        <p:nvSpPr>
+          <p:cNvPr id="4" name="Shape 2"/>
+          <p:cNvSpPr/>
+          <p:nvPr/>
+        </p:nvSpPr>
+        <p:spPr>
+          <a:xfrm>
+            <a:off x="4206240" y="5029200"/>
+            <a:ext cx="3749040" cy="685800"/>
           </a:xfrm>
           <a:prstGeom prst="roundRect">
             <a:avLst/>
@@ -3268,14 +4423,14 @@
       </p:sp>
       <p:sp>
         <p:nvSpPr>
-          <p:cNvPr id="6" name="Text 4"/>
-          <p:cNvSpPr/>
-          <p:nvPr/>
-        </p:nvSpPr>
-        <p:spPr>
-          <a:xfrm>
-            <a:off x="4663440" y="4480560"/>
-            <a:ext cx="2834640" cy="182880"/>
+          <p:cNvPr id="5" name="Text 3"/>
+          <p:cNvSpPr/>
+          <p:nvPr/>
+        </p:nvSpPr>
+        <p:spPr>
+          <a:xfrm>
+            <a:off x="4206240" y="5257800"/>
+            <a:ext cx="3749040" cy="274320"/>
           </a:xfrm>
           <a:prstGeom prst="rect">
             <a:avLst/>
@@ -3291,14 +4446,14 @@
               <a:buNone/>
             </a:pPr>
             <a:r>
-              <a:rPr lang="en-US" sz="1200" b="1" dirty="0">
+              <a:rPr lang="en-US" sz="1400" b="1" dirty="0">
                 <a:solidFill>
                   <a:srgbClr val="FFFFFF"/>
                 </a:solidFill>
               </a:rPr>
-              <a:t>Let's Build Success</a:t>
-            </a:r>
-            <a:endParaRPr lang="en-US" sz="1200" dirty="0"/>
+              <a:t>Next: Text Representations</a:t>
+            </a:r>
+            <a:endParaRPr lang="en-US" sz="1400" dirty="0"/>
           </a:p>
         </p:txBody>
       </p:sp>
